--- a/site/tema6/diapositivas/casos-uso.pptx
+++ b/site/tema6/diapositivas/casos-uso.pptx
@@ -16,9 +16,12 @@
     <p:sldId id="264" r:id="rId10"/>
     <p:sldId id="265" r:id="rId11"/>
     <p:sldId id="266" r:id="rId12"/>
+    <p:sldId id="267" r:id="rId13"/>
+    <p:sldId id="268" r:id="rId14"/>
+    <p:sldId id="269" r:id="rId15"/>
   </p:sldIdLst>
   <p:notesMasterIdLst>
-    <p:notesMasterId r:id="rId13"/>
+    <p:notesMasterId r:id="rId16"/>
   </p:notesMasterIdLst>
   <p:sldSz cx="12192000" cy="6858000"/>
   <p:notesSz cx="6858000" cy="12192000"/>
@@ -712,6 +715,270 @@
             <a:fld id="{F7021451-1387-4CA6-816F-3879F97B5CBC}" type="slidenum">
               <a:rPr lang="en-US"/>
               <a:t>11</a:t>
+            </a:fld>
+            <a:endParaRPr lang="en-US"/>
+          </a:p>
+        </p:txBody>
+      </p:sp>
+    </p:spTree>
+    <p:extLst>
+      <p:ext uri="{BB962C8B-B14F-4D97-AF65-F5344CB8AC3E}">
+        <p14:creationId xmlns:p14="http://schemas.microsoft.com/office/powerpoint/2010/main" val="1024086991"/>
+      </p:ext>
+    </p:extLst>
+  </p:cSld>
+  <p:clrMapOvr>
+    <a:masterClrMapping/>
+  </p:clrMapOvr>
+</p:notes>
+</file>
+
+<file path=ppt/notesSlides/notesSlide12.xml><?xml version="1.0" encoding="utf-8"?>
+<p:notes xmlns:a="http://schemas.openxmlformats.org/drawingml/2006/main" xmlns:r="http://schemas.openxmlformats.org/officeDocument/2006/relationships" xmlns:p="http://schemas.openxmlformats.org/presentationml/2006/main">
+  <p:cSld>
+    <p:spTree>
+      <p:nvGrpSpPr>
+        <p:cNvPr id="1" name=""/>
+        <p:cNvGrpSpPr/>
+        <p:nvPr/>
+      </p:nvGrpSpPr>
+      <p:grpSpPr>
+        <a:xfrm>
+          <a:off x="0" y="0"/>
+          <a:ext cx="0" cy="0"/>
+          <a:chOff x="0" y="0"/>
+          <a:chExt cx="0" cy="0"/>
+        </a:xfrm>
+      </p:grpSpPr>
+      <p:sp>
+        <p:nvSpPr>
+          <p:cNvPr id="2" name="Slide Image Placeholder 1"/>
+          <p:cNvSpPr>
+            <a:spLocks noGrp="1" noRot="1" noChangeAspect="1"/>
+          </p:cNvSpPr>
+          <p:nvPr>
+            <p:ph type="sldImg"/>
+          </p:nvPr>
+        </p:nvSpPr>
+        <p:spPr/>
+      </p:sp>
+      <p:sp>
+        <p:nvSpPr>
+          <p:cNvPr id="3" name="Notes Placeholder 2"/>
+          <p:cNvSpPr>
+            <a:spLocks noGrp="1"/>
+          </p:cNvSpPr>
+          <p:nvPr>
+            <p:ph type="body" idx="1"/>
+          </p:nvPr>
+        </p:nvSpPr>
+        <p:spPr/>
+        <p:txBody>
+          <a:bodyPr/>
+          <a:lstStyle/>
+          <a:p>
+            <a:r>
+              <a:rPr lang="en-US" dirty="0"/>
+              <a:t/>
+            </a:r>
+            <a:endParaRPr lang="en-US" dirty="0"/>
+          </a:p>
+        </p:txBody>
+      </p:sp>
+      <p:sp>
+        <p:nvSpPr>
+          <p:cNvPr id="4" name="Slide Number Placeholder 3"/>
+          <p:cNvSpPr>
+            <a:spLocks noGrp="1"/>
+          </p:cNvSpPr>
+          <p:nvPr>
+            <p:ph type="sldNum" sz="quarter" idx="10"/>
+          </p:nvPr>
+        </p:nvSpPr>
+        <p:spPr/>
+        <p:txBody>
+          <a:bodyPr/>
+          <a:lstStyle/>
+          <a:p>
+            <a:fld id="{F7021451-1387-4CA6-816F-3879F97B5CBC}" type="slidenum">
+              <a:rPr lang="en-US"/>
+              <a:t>12</a:t>
+            </a:fld>
+            <a:endParaRPr lang="en-US"/>
+          </a:p>
+        </p:txBody>
+      </p:sp>
+    </p:spTree>
+    <p:extLst>
+      <p:ext uri="{BB962C8B-B14F-4D97-AF65-F5344CB8AC3E}">
+        <p14:creationId xmlns:p14="http://schemas.microsoft.com/office/powerpoint/2010/main" val="1024086991"/>
+      </p:ext>
+    </p:extLst>
+  </p:cSld>
+  <p:clrMapOvr>
+    <a:masterClrMapping/>
+  </p:clrMapOvr>
+</p:notes>
+</file>
+
+<file path=ppt/notesSlides/notesSlide13.xml><?xml version="1.0" encoding="utf-8"?>
+<p:notes xmlns:a="http://schemas.openxmlformats.org/drawingml/2006/main" xmlns:r="http://schemas.openxmlformats.org/officeDocument/2006/relationships" xmlns:p="http://schemas.openxmlformats.org/presentationml/2006/main">
+  <p:cSld>
+    <p:spTree>
+      <p:nvGrpSpPr>
+        <p:cNvPr id="1" name=""/>
+        <p:cNvGrpSpPr/>
+        <p:nvPr/>
+      </p:nvGrpSpPr>
+      <p:grpSpPr>
+        <a:xfrm>
+          <a:off x="0" y="0"/>
+          <a:ext cx="0" cy="0"/>
+          <a:chOff x="0" y="0"/>
+          <a:chExt cx="0" cy="0"/>
+        </a:xfrm>
+      </p:grpSpPr>
+      <p:sp>
+        <p:nvSpPr>
+          <p:cNvPr id="2" name="Slide Image Placeholder 1"/>
+          <p:cNvSpPr>
+            <a:spLocks noGrp="1" noRot="1" noChangeAspect="1"/>
+          </p:cNvSpPr>
+          <p:nvPr>
+            <p:ph type="sldImg"/>
+          </p:nvPr>
+        </p:nvSpPr>
+        <p:spPr/>
+      </p:sp>
+      <p:sp>
+        <p:nvSpPr>
+          <p:cNvPr id="3" name="Notes Placeholder 2"/>
+          <p:cNvSpPr>
+            <a:spLocks noGrp="1"/>
+          </p:cNvSpPr>
+          <p:nvPr>
+            <p:ph type="body" idx="1"/>
+          </p:nvPr>
+        </p:nvSpPr>
+        <p:spPr/>
+        <p:txBody>
+          <a:bodyPr/>
+          <a:lstStyle/>
+          <a:p>
+            <a:r>
+              <a:rPr lang="en-US" dirty="0"/>
+              <a:t/>
+            </a:r>
+            <a:endParaRPr lang="en-US" dirty="0"/>
+          </a:p>
+        </p:txBody>
+      </p:sp>
+      <p:sp>
+        <p:nvSpPr>
+          <p:cNvPr id="4" name="Slide Number Placeholder 3"/>
+          <p:cNvSpPr>
+            <a:spLocks noGrp="1"/>
+          </p:cNvSpPr>
+          <p:nvPr>
+            <p:ph type="sldNum" sz="quarter" idx="10"/>
+          </p:nvPr>
+        </p:nvSpPr>
+        <p:spPr/>
+        <p:txBody>
+          <a:bodyPr/>
+          <a:lstStyle/>
+          <a:p>
+            <a:fld id="{F7021451-1387-4CA6-816F-3879F97B5CBC}" type="slidenum">
+              <a:rPr lang="en-US"/>
+              <a:t>13</a:t>
+            </a:fld>
+            <a:endParaRPr lang="en-US"/>
+          </a:p>
+        </p:txBody>
+      </p:sp>
+    </p:spTree>
+    <p:extLst>
+      <p:ext uri="{BB962C8B-B14F-4D97-AF65-F5344CB8AC3E}">
+        <p14:creationId xmlns:p14="http://schemas.microsoft.com/office/powerpoint/2010/main" val="1024086991"/>
+      </p:ext>
+    </p:extLst>
+  </p:cSld>
+  <p:clrMapOvr>
+    <a:masterClrMapping/>
+  </p:clrMapOvr>
+</p:notes>
+</file>
+
+<file path=ppt/notesSlides/notesSlide14.xml><?xml version="1.0" encoding="utf-8"?>
+<p:notes xmlns:a="http://schemas.openxmlformats.org/drawingml/2006/main" xmlns:r="http://schemas.openxmlformats.org/officeDocument/2006/relationships" xmlns:p="http://schemas.openxmlformats.org/presentationml/2006/main">
+  <p:cSld>
+    <p:spTree>
+      <p:nvGrpSpPr>
+        <p:cNvPr id="1" name=""/>
+        <p:cNvGrpSpPr/>
+        <p:nvPr/>
+      </p:nvGrpSpPr>
+      <p:grpSpPr>
+        <a:xfrm>
+          <a:off x="0" y="0"/>
+          <a:ext cx="0" cy="0"/>
+          <a:chOff x="0" y="0"/>
+          <a:chExt cx="0" cy="0"/>
+        </a:xfrm>
+      </p:grpSpPr>
+      <p:sp>
+        <p:nvSpPr>
+          <p:cNvPr id="2" name="Slide Image Placeholder 1"/>
+          <p:cNvSpPr>
+            <a:spLocks noGrp="1" noRot="1" noChangeAspect="1"/>
+          </p:cNvSpPr>
+          <p:nvPr>
+            <p:ph type="sldImg"/>
+          </p:nvPr>
+        </p:nvSpPr>
+        <p:spPr/>
+      </p:sp>
+      <p:sp>
+        <p:nvSpPr>
+          <p:cNvPr id="3" name="Notes Placeholder 2"/>
+          <p:cNvSpPr>
+            <a:spLocks noGrp="1"/>
+          </p:cNvSpPr>
+          <p:nvPr>
+            <p:ph type="body" idx="1"/>
+          </p:nvPr>
+        </p:nvSpPr>
+        <p:spPr/>
+        <p:txBody>
+          <a:bodyPr/>
+          <a:lstStyle/>
+          <a:p>
+            <a:r>
+              <a:rPr lang="en-US" dirty="0"/>
+              <a:t/>
+            </a:r>
+            <a:endParaRPr lang="en-US" dirty="0"/>
+          </a:p>
+        </p:txBody>
+      </p:sp>
+      <p:sp>
+        <p:nvSpPr>
+          <p:cNvPr id="4" name="Slide Number Placeholder 3"/>
+          <p:cNvSpPr>
+            <a:spLocks noGrp="1"/>
+          </p:cNvSpPr>
+          <p:nvPr>
+            <p:ph type="sldNum" sz="quarter" idx="10"/>
+          </p:nvPr>
+        </p:nvSpPr>
+        <p:spPr/>
+        <p:txBody>
+          <a:bodyPr/>
+          <a:lstStyle/>
+          <a:p>
+            <a:fld id="{F7021451-1387-4CA6-816F-3879F97B5CBC}" type="slidenum">
+              <a:rPr lang="en-US"/>
+              <a:t>14</a:t>
             </a:fld>
             <a:endParaRPr lang="en-US"/>
           </a:p>
@@ -1990,7 +2257,7 @@
                 <a:ea typeface="Arial" pitchFamily="34" charset="-122"/>
                 <a:cs typeface="Arial" pitchFamily="34" charset="-120"/>
               </a:rPr>
-              <a:t>Recomendaciones</a:t>
+              <a:t>En DIA — configurar «extend»</a:t>
             </a:r>
             <a:endParaRPr lang="en-US" sz="2300" dirty="0"/>
           </a:p>
@@ -2004,8 +2271,8 @@
         </p:nvSpPr>
         <p:spPr>
           <a:xfrm>
-            <a:off x="548640" y="1097280"/>
-            <a:ext cx="11091672" cy="3108960"/>
+            <a:off x="548640" y="1188720"/>
+            <a:ext cx="6309360" cy="1737360"/>
           </a:xfrm>
           <a:prstGeom prst="rect">
             <a:avLst/>
@@ -2019,12 +2286,12 @@
           <a:p>
             <a:pPr indent="0" marL="0">
               <a:spcAft>
-                <a:spcPts val="800"/>
+                <a:spcPts val="1000"/>
               </a:spcAft>
               <a:buNone/>
             </a:pPr>
             <a:r>
-              <a:rPr lang="en-US" sz="1600" dirty="0">
+              <a:rPr lang="en-US" sz="1700" dirty="0">
                 <a:solidFill>
                   <a:srgbClr val="212121"/>
                 </a:solidFill>
@@ -2032,19 +2299,19 @@
                 <a:ea typeface="Arial" pitchFamily="34" charset="-122"/>
                 <a:cs typeface="Arial" pitchFamily="34" charset="-120"/>
               </a:rPr>
-              <a:t>•  Los casos de uso describen las interacciones más importantes con el sistema, no su funcionamiento interno.</a:t>
-            </a:r>
-            <a:endParaRPr lang="en-US" sz="1600" dirty="0"/>
+              <a:t>•  Igual que con include: herramienta UML - Dependency de la paleta.</a:t>
+            </a:r>
+            <a:endParaRPr lang="en-US" sz="1700" dirty="0"/>
           </a:p>
           <a:p>
             <a:pPr indent="0" marL="0">
               <a:spcAft>
-                <a:spcPts val="800"/>
+                <a:spcPts val="1000"/>
               </a:spcAft>
               <a:buNone/>
             </a:pPr>
             <a:r>
-              <a:rPr lang="en-US" sz="1600" dirty="0">
+              <a:rPr lang="en-US" sz="1700" dirty="0">
                 <a:solidFill>
                   <a:srgbClr val="212121"/>
                 </a:solidFill>
@@ -2052,62 +2319,107 @@
                 <a:ea typeface="Arial" pitchFamily="34" charset="-122"/>
                 <a:cs typeface="Arial" pitchFamily="34" charset="-120"/>
               </a:rPr>
-              <a:t>•  Mantén el diagrama lo más simple posible: todo el mundo (incluidos clientes sin perfil técnico) debe entenderlo.</a:t>
-            </a:r>
-            <a:endParaRPr lang="en-US" sz="1600" dirty="0"/>
-          </a:p>
-          <a:p>
-            <a:pPr indent="0" marL="0">
-              <a:spcAft>
-                <a:spcPts val="800"/>
-              </a:spcAft>
+              <a:t>•  Doble clic sobre la línea → campo Estereotipo: extends.</a:t>
+            </a:r>
+            <a:endParaRPr lang="en-US" sz="1700" dirty="0"/>
+          </a:p>
+        </p:txBody>
+      </p:sp>
+      <p:sp>
+        <p:nvSpPr>
+          <p:cNvPr id="5" name="Shape 3"/>
+          <p:cNvSpPr/>
+          <p:nvPr/>
+        </p:nvSpPr>
+        <p:spPr>
+          <a:xfrm>
+            <a:off x="7406640" y="1280160"/>
+            <a:ext cx="3840480" cy="2688336"/>
+          </a:xfrm>
+          <a:prstGeom prst="rect">
+            <a:avLst/>
+          </a:prstGeom>
+          <a:ln w="12700">
+            <a:solidFill>
+              <a:srgbClr val="EEEEEE"/>
+            </a:solidFill>
+            <a:prstDash val="solid"/>
+          </a:ln>
+        </p:spPr>
+      </p:sp>
+      <p:pic>
+        <p:nvPicPr>
+          <p:cNvPr id="6" name="Image 0" descr="C:/Users/Aitor/Documents/apuntes-profe/entornos-de-desarrollo/docs/tema6/img/casos-extend-propiedades.png">    </p:cNvPr>
+          <p:cNvPicPr>
+            <a:picLocks noChangeAspect="1"/>
+          </p:cNvPicPr>
+          <p:nvPr/>
+        </p:nvPicPr>
+        <p:blipFill>
+          <a:blip r:embed="rId1"/>
+          <a:stretch>
+            <a:fillRect/>
+          </a:stretch>
+        </p:blipFill>
+        <p:spPr>
+          <a:xfrm>
+            <a:off x="7406640" y="1280160"/>
+            <a:ext cx="3840480" cy="2688336"/>
+          </a:xfrm>
+          <a:prstGeom prst="rect">
+            <a:avLst/>
+          </a:prstGeom>
+        </p:spPr>
+      </p:pic>
+      <p:sp>
+        <p:nvSpPr>
+          <p:cNvPr id="7" name="Text 4"/>
+          <p:cNvSpPr/>
+          <p:nvPr/>
+        </p:nvSpPr>
+        <p:spPr>
+          <a:xfrm>
+            <a:off x="7132320" y="3995928"/>
+            <a:ext cx="4389120" cy="320040"/>
+          </a:xfrm>
+          <a:prstGeom prst="rect">
+            <a:avLst/>
+          </a:prstGeom>
+          <a:noFill/>
+          <a:ln/>
+        </p:spPr>
+        <p:txBody>
+          <a:bodyPr wrap="square" rtlCol="0" anchor="t"/>
+          <a:lstStyle/>
+          <a:p>
+            <a:pPr algn="ctr" indent="0" marL="0">
               <a:buNone/>
             </a:pPr>
             <a:r>
-              <a:rPr lang="en-US" sz="1600" dirty="0">
+              <a:rPr lang="en-US" sz="1100" i="1" dirty="0">
                 <a:solidFill>
-                  <a:srgbClr val="212121"/>
+                  <a:srgbClr val="757575"/>
                 </a:solidFill>
                 <a:latin typeface="Arial" pitchFamily="34" charset="0"/>
                 <a:ea typeface="Arial" pitchFamily="34" charset="-122"/>
                 <a:cs typeface="Arial" pitchFamily="34" charset="-120"/>
               </a:rPr>
-              <a:t>•  No abuses de «include» para descomponer cada caso en sub-casos: los requisitos cambian y cada descomposición de hoy puede quedar obsoleta mañana.</a:t>
-            </a:r>
-            <a:endParaRPr lang="en-US" sz="1600" dirty="0"/>
-          </a:p>
-          <a:p>
-            <a:pPr indent="0" marL="0">
-              <a:spcAft>
-                <a:spcPts val="800"/>
-              </a:spcAft>
-              <a:buNone/>
-            </a:pPr>
-            <a:r>
-              <a:rPr lang="en-US" sz="1600" dirty="0">
-                <a:solidFill>
-                  <a:srgbClr val="212121"/>
-                </a:solidFill>
-                <a:latin typeface="Arial" pitchFamily="34" charset="0"/>
-                <a:ea typeface="Arial" pitchFamily="34" charset="-122"/>
-                <a:cs typeface="Arial" pitchFamily="34" charset="-120"/>
-              </a:rPr>
-              <a:t>•  Acompaña siempre el diagrama con la descripción narrativa de cada caso de uso: quién lo inicia, escenario principal, escenarios alternativos.</a:t>
-            </a:r>
-            <a:endParaRPr lang="en-US" sz="1600" dirty="0"/>
-          </a:p>
-        </p:txBody>
-      </p:sp>
-      <p:sp>
-        <p:nvSpPr>
-          <p:cNvPr id="5" name="Shape 3"/>
+              <a:t>Propiedades de la relación «extend» en DIA: estereotipo "extends"</a:t>
+            </a:r>
+            <a:endParaRPr lang="en-US" sz="1100" dirty="0"/>
+          </a:p>
+        </p:txBody>
+      </p:sp>
+      <p:sp>
+        <p:nvSpPr>
+          <p:cNvPr id="8" name="Shape 5"/>
           <p:cNvSpPr/>
           <p:nvPr/>
         </p:nvSpPr>
         <p:spPr>
           <a:xfrm>
             <a:off x="548640" y="4754880"/>
-            <a:ext cx="11091672" cy="868680"/>
+            <a:ext cx="11091672" cy="960120"/>
           </a:xfrm>
           <a:prstGeom prst="roundRect">
             <a:avLst/>
@@ -2125,14 +2437,14 @@
       </p:sp>
       <p:sp>
         <p:nvSpPr>
-          <p:cNvPr id="6" name="Text 4"/>
+          <p:cNvPr id="9" name="Text 6"/>
           <p:cNvSpPr/>
           <p:nvPr/>
         </p:nvSpPr>
         <p:spPr>
           <a:xfrm>
             <a:off x="777240" y="4828032"/>
-            <a:ext cx="10634472" cy="722376"/>
+            <a:ext cx="10634472" cy="813816"/>
           </a:xfrm>
           <a:prstGeom prst="rect">
             <a:avLst/>
@@ -2156,7 +2468,7 @@
                 <a:ea typeface="Arial" pitchFamily="34" charset="-122"/>
                 <a:cs typeface="Arial" pitchFamily="34" charset="-120"/>
               </a:rPr>
-              <a:t>Error frecuente: incluir pasos del flujo interno ("Conectar a la base de datos", "Validar token"). Esos detalles no los ve el usuario y no pertenecen aquí.</a:t>
+              <a:t>La regla de las flechas (cae en examen): «include» apunta al caso incluido; «extend» apunta al caso base. Se ve en la siguiente diapositiva.</a:t>
             </a:r>
             <a:endParaRPr lang="en-US" sz="1400" dirty="0"/>
           </a:p>
@@ -2164,7 +2476,7 @@
       </p:sp>
       <p:sp>
         <p:nvSpPr>
-          <p:cNvPr id="7" name="Text 5"/>
+          <p:cNvPr id="10" name="Text 7"/>
           <p:cNvSpPr/>
           <p:nvPr/>
         </p:nvSpPr>
@@ -2284,7 +2596,7 @@
                 <a:ea typeface="Arial" pitchFamily="34" charset="-122"/>
                 <a:cs typeface="Arial" pitchFamily="34" charset="-120"/>
               </a:rPr>
-              <a:t>Resumen de relaciones</a:t>
+              <a:t>La regla de las flechas (cae en examen)</a:t>
             </a:r>
             <a:endParaRPr lang="en-US" sz="2300" dirty="0"/>
           </a:p>
@@ -2293,6 +2605,1584 @@
       <p:graphicFrame>
         <p:nvGraphicFramePr>
           <p:cNvPr id="12" name="Table 0"/>
+          <p:cNvGraphicFramePr>
+            <a:graphicFrameLocks noGrp="1"/>
+          </p:cNvGraphicFramePr>
+          <p:nvPr>
+            <p:extLst>
+              <p:ext uri="{D42A27DB-BD31-4B8C-83A1-F6EECF244321}">
+                <p14:modId xmlns:p14="http://schemas.microsoft.com/office/powerpoint/2010/main" val="1579011935"/>
+              </p:ext>
+            </p:extLst>
+          </p:nvPr>
+        </p:nvGraphicFramePr>
+        <p:xfrm>
+          <a:off x="548640" y="1234440"/>
+          <a:ext cx="11091672" cy="914400"/>
+        </p:xfrm>
+        <a:graphic>
+          <a:graphicData uri="http://schemas.openxmlformats.org/drawingml/2006/table">
+            <a:tbl>
+              <a:tblPr/>
+              <a:tblGrid>
+                <a:gridCol w="2218334"/>
+                <a:gridCol w="4658502"/>
+                <a:gridCol w="4214835"/>
+              </a:tblGrid>
+              <a:tr h="777240">
+                <a:tc>
+                  <a:txBody>
+                    <a:bodyPr/>
+                    <a:lstStyle/>
+                    <a:p>
+                      <a:pPr algn="ctr" indent="0" marL="0">
+                        <a:buNone/>
+                      </a:pPr>
+                      <a:r>
+                        <a:rPr lang="en-US" sz="1500" b="1" dirty="0">
+                          <a:solidFill>
+                            <a:srgbClr val="FFFFFF"/>
+                          </a:solidFill>
+                          <a:latin typeface="Arial" pitchFamily="34" charset="0"/>
+                          <a:ea typeface="Arial" pitchFamily="34" charset="-122"/>
+                          <a:cs typeface="Arial" pitchFamily="34" charset="-120"/>
+                        </a:rPr>
+                        <a:t>Relación</a:t>
+                      </a:r>
+                      <a:endParaRPr lang="en-US" sz="1500" dirty="0">
+                        <a:latin typeface="Arial" charset="0"/>
+                        <a:ea typeface="Arial" charset="0"/>
+                        <a:cs typeface="Arial" charset="0"/>
+                      </a:endParaRPr>
+                    </a:p>
+                  </a:txBody>
+                  <a:tcPr marL="54864" marR="54864" marT="54864" marB="54864" anchor="ctr">
+                    <a:lnL w="12700" cap="flat" cmpd="sng" algn="ctr">
+                      <a:solidFill>
+                        <a:srgbClr val="EEEEEE"/>
+                      </a:solidFill>
+                      <a:prstDash val="solid"/>
+                      <a:round/>
+                      <a:headEnd type="none" w="med" len="med"/>
+                      <a:tailEnd type="none" w="med" len="med"/>
+                    </a:lnL>
+                    <a:lnR w="12700" cap="flat" cmpd="sng" algn="ctr">
+                      <a:solidFill>
+                        <a:srgbClr val="EEEEEE"/>
+                      </a:solidFill>
+                      <a:prstDash val="solid"/>
+                      <a:round/>
+                      <a:headEnd type="none" w="med" len="med"/>
+                      <a:tailEnd type="none" w="med" len="med"/>
+                    </a:lnR>
+                    <a:lnT w="12700" cap="flat" cmpd="sng" algn="ctr">
+                      <a:solidFill>
+                        <a:srgbClr val="EEEEEE"/>
+                      </a:solidFill>
+                      <a:prstDash val="solid"/>
+                      <a:round/>
+                      <a:headEnd type="none" w="med" len="med"/>
+                      <a:tailEnd type="none" w="med" len="med"/>
+                    </a:lnT>
+                    <a:lnB w="12700" cap="flat" cmpd="sng" algn="ctr">
+                      <a:solidFill>
+                        <a:srgbClr val="EEEEEE"/>
+                      </a:solidFill>
+                      <a:prstDash val="solid"/>
+                      <a:round/>
+                      <a:headEnd type="none" w="med" len="med"/>
+                      <a:tailEnd type="none" w="med" len="med"/>
+                    </a:lnB>
+                    <a:solidFill>
+                      <a:srgbClr val="3F51B5"/>
+                    </a:solidFill>
+                  </a:tcPr>
+                </a:tc>
+                <a:tc>
+                  <a:txBody>
+                    <a:bodyPr/>
+                    <a:lstStyle/>
+                    <a:p>
+                      <a:pPr algn="ctr" indent="0" marL="0">
+                        <a:buNone/>
+                      </a:pPr>
+                      <a:r>
+                        <a:rPr lang="en-US" sz="1500" b="1" dirty="0">
+                          <a:solidFill>
+                            <a:srgbClr val="FFFFFF"/>
+                          </a:solidFill>
+                          <a:latin typeface="Arial" pitchFamily="34" charset="0"/>
+                          <a:ea typeface="Arial" pitchFamily="34" charset="-122"/>
+                          <a:cs typeface="Arial" pitchFamily="34" charset="-120"/>
+                        </a:rPr>
+                        <a:t>La flecha apunta a...</a:t>
+                      </a:r>
+                      <a:endParaRPr lang="en-US" sz="1500" dirty="0">
+                        <a:latin typeface="Arial" charset="0"/>
+                        <a:ea typeface="Arial" charset="0"/>
+                        <a:cs typeface="Arial" charset="0"/>
+                      </a:endParaRPr>
+                    </a:p>
+                  </a:txBody>
+                  <a:tcPr marL="54864" marR="54864" marT="54864" marB="54864" anchor="ctr">
+                    <a:lnL w="12700" cap="flat" cmpd="sng" algn="ctr">
+                      <a:solidFill>
+                        <a:srgbClr val="EEEEEE"/>
+                      </a:solidFill>
+                      <a:prstDash val="solid"/>
+                      <a:round/>
+                      <a:headEnd type="none" w="med" len="med"/>
+                      <a:tailEnd type="none" w="med" len="med"/>
+                    </a:lnL>
+                    <a:lnR w="12700" cap="flat" cmpd="sng" algn="ctr">
+                      <a:solidFill>
+                        <a:srgbClr val="EEEEEE"/>
+                      </a:solidFill>
+                      <a:prstDash val="solid"/>
+                      <a:round/>
+                      <a:headEnd type="none" w="med" len="med"/>
+                      <a:tailEnd type="none" w="med" len="med"/>
+                    </a:lnR>
+                    <a:lnT w="12700" cap="flat" cmpd="sng" algn="ctr">
+                      <a:solidFill>
+                        <a:srgbClr val="EEEEEE"/>
+                      </a:solidFill>
+                      <a:prstDash val="solid"/>
+                      <a:round/>
+                      <a:headEnd type="none" w="med" len="med"/>
+                      <a:tailEnd type="none" w="med" len="med"/>
+                    </a:lnT>
+                    <a:lnB w="12700" cap="flat" cmpd="sng" algn="ctr">
+                      <a:solidFill>
+                        <a:srgbClr val="EEEEEE"/>
+                      </a:solidFill>
+                      <a:prstDash val="solid"/>
+                      <a:round/>
+                      <a:headEnd type="none" w="med" len="med"/>
+                      <a:tailEnd type="none" w="med" len="med"/>
+                    </a:lnB>
+                    <a:solidFill>
+                      <a:srgbClr val="3F51B5"/>
+                    </a:solidFill>
+                  </a:tcPr>
+                </a:tc>
+                <a:tc>
+                  <a:txBody>
+                    <a:bodyPr/>
+                    <a:lstStyle/>
+                    <a:p>
+                      <a:pPr algn="ctr" indent="0" marL="0">
+                        <a:buNone/>
+                      </a:pPr>
+                      <a:r>
+                        <a:rPr lang="en-US" sz="1500" b="1" dirty="0">
+                          <a:solidFill>
+                            <a:srgbClr val="FFFFFF"/>
+                          </a:solidFill>
+                          <a:latin typeface="Arial" pitchFamily="34" charset="0"/>
+                          <a:ea typeface="Arial" pitchFamily="34" charset="-122"/>
+                          <a:cs typeface="Arial" pitchFamily="34" charset="-120"/>
+                        </a:rPr>
+                        <a:t>Ejemplo</a:t>
+                      </a:r>
+                      <a:endParaRPr lang="en-US" sz="1500" dirty="0">
+                        <a:latin typeface="Arial" charset="0"/>
+                        <a:ea typeface="Arial" charset="0"/>
+                        <a:cs typeface="Arial" charset="0"/>
+                      </a:endParaRPr>
+                    </a:p>
+                  </a:txBody>
+                  <a:tcPr marL="54864" marR="54864" marT="54864" marB="54864" anchor="ctr">
+                    <a:lnL w="12700" cap="flat" cmpd="sng" algn="ctr">
+                      <a:solidFill>
+                        <a:srgbClr val="EEEEEE"/>
+                      </a:solidFill>
+                      <a:prstDash val="solid"/>
+                      <a:round/>
+                      <a:headEnd type="none" w="med" len="med"/>
+                      <a:tailEnd type="none" w="med" len="med"/>
+                    </a:lnL>
+                    <a:lnR w="12700" cap="flat" cmpd="sng" algn="ctr">
+                      <a:solidFill>
+                        <a:srgbClr val="EEEEEE"/>
+                      </a:solidFill>
+                      <a:prstDash val="solid"/>
+                      <a:round/>
+                      <a:headEnd type="none" w="med" len="med"/>
+                      <a:tailEnd type="none" w="med" len="med"/>
+                    </a:lnR>
+                    <a:lnT w="12700" cap="flat" cmpd="sng" algn="ctr">
+                      <a:solidFill>
+                        <a:srgbClr val="EEEEEE"/>
+                      </a:solidFill>
+                      <a:prstDash val="solid"/>
+                      <a:round/>
+                      <a:headEnd type="none" w="med" len="med"/>
+                      <a:tailEnd type="none" w="med" len="med"/>
+                    </a:lnT>
+                    <a:lnB w="12700" cap="flat" cmpd="sng" algn="ctr">
+                      <a:solidFill>
+                        <a:srgbClr val="EEEEEE"/>
+                      </a:solidFill>
+                      <a:prstDash val="solid"/>
+                      <a:round/>
+                      <a:headEnd type="none" w="med" len="med"/>
+                      <a:tailEnd type="none" w="med" len="med"/>
+                    </a:lnB>
+                    <a:solidFill>
+                      <a:srgbClr val="3F51B5"/>
+                    </a:solidFill>
+                  </a:tcPr>
+                </a:tc>
+              </a:tr>
+              <a:tr h="777240">
+                <a:tc>
+                  <a:txBody>
+                    <a:bodyPr/>
+                    <a:lstStyle/>
+                    <a:p>
+                      <a:pPr algn="l" indent="0" marL="0">
+                        <a:buNone/>
+                      </a:pPr>
+                      <a:r>
+                        <a:rPr lang="en-US" sz="1500" b="1" dirty="0">
+                          <a:solidFill>
+                            <a:srgbClr val="212121"/>
+                          </a:solidFill>
+                          <a:latin typeface="Arial" pitchFamily="34" charset="0"/>
+                          <a:ea typeface="Arial" pitchFamily="34" charset="-122"/>
+                          <a:cs typeface="Arial" pitchFamily="34" charset="-120"/>
+                        </a:rPr>
+                        <a:t>«include»</a:t>
+                      </a:r>
+                      <a:endParaRPr lang="en-US" sz="1500" dirty="0">
+                        <a:latin typeface="Arial" charset="0"/>
+                        <a:ea typeface="Arial" charset="0"/>
+                        <a:cs typeface="Arial" charset="0"/>
+                      </a:endParaRPr>
+                    </a:p>
+                  </a:txBody>
+                  <a:tcPr marL="54864" marR="54864" marT="54864" marB="54864" anchor="ctr">
+                    <a:lnL w="12700" cap="flat" cmpd="sng" algn="ctr">
+                      <a:solidFill>
+                        <a:srgbClr val="EEEEEE"/>
+                      </a:solidFill>
+                      <a:prstDash val="solid"/>
+                      <a:round/>
+                      <a:headEnd type="none" w="med" len="med"/>
+                      <a:tailEnd type="none" w="med" len="med"/>
+                    </a:lnL>
+                    <a:lnR w="12700" cap="flat" cmpd="sng" algn="ctr">
+                      <a:solidFill>
+                        <a:srgbClr val="EEEEEE"/>
+                      </a:solidFill>
+                      <a:prstDash val="solid"/>
+                      <a:round/>
+                      <a:headEnd type="none" w="med" len="med"/>
+                      <a:tailEnd type="none" w="med" len="med"/>
+                    </a:lnR>
+                    <a:lnT w="12700" cap="flat" cmpd="sng" algn="ctr">
+                      <a:solidFill>
+                        <a:srgbClr val="EEEEEE"/>
+                      </a:solidFill>
+                      <a:prstDash val="solid"/>
+                      <a:round/>
+                      <a:headEnd type="none" w="med" len="med"/>
+                      <a:tailEnd type="none" w="med" len="med"/>
+                    </a:lnT>
+                    <a:lnB w="12700" cap="flat" cmpd="sng" algn="ctr">
+                      <a:solidFill>
+                        <a:srgbClr val="EEEEEE"/>
+                      </a:solidFill>
+                      <a:prstDash val="solid"/>
+                      <a:round/>
+                      <a:headEnd type="none" w="med" len="med"/>
+                      <a:tailEnd type="none" w="med" len="med"/>
+                    </a:lnB>
+                    <a:solidFill>
+                      <a:srgbClr val="FFFFFF"/>
+                    </a:solidFill>
+                  </a:tcPr>
+                </a:tc>
+                <a:tc>
+                  <a:txBody>
+                    <a:bodyPr/>
+                    <a:lstStyle/>
+                    <a:p>
+                      <a:pPr algn="l" indent="0" marL="0">
+                        <a:buNone/>
+                      </a:pPr>
+                      <a:r>
+                        <a:rPr lang="en-US" sz="1500" dirty="0">
+                          <a:solidFill>
+                            <a:srgbClr val="212121"/>
+                          </a:solidFill>
+                          <a:latin typeface="Arial" pitchFamily="34" charset="0"/>
+                          <a:ea typeface="Arial" pitchFamily="34" charset="-122"/>
+                          <a:cs typeface="Arial" pitchFamily="34" charset="-120"/>
+                        </a:rPr>
+                        <a:t>el caso INCLUIDO (el trozo reutilizado)</a:t>
+                      </a:r>
+                      <a:endParaRPr lang="en-US" sz="1500" dirty="0">
+                        <a:latin typeface="Arial" charset="0"/>
+                        <a:ea typeface="Arial" charset="0"/>
+                        <a:cs typeface="Arial" charset="0"/>
+                      </a:endParaRPr>
+                    </a:p>
+                  </a:txBody>
+                  <a:tcPr marL="54864" marR="54864" marT="54864" marB="54864" anchor="ctr">
+                    <a:lnL w="12700" cap="flat" cmpd="sng" algn="ctr">
+                      <a:solidFill>
+                        <a:srgbClr val="EEEEEE"/>
+                      </a:solidFill>
+                      <a:prstDash val="solid"/>
+                      <a:round/>
+                      <a:headEnd type="none" w="med" len="med"/>
+                      <a:tailEnd type="none" w="med" len="med"/>
+                    </a:lnL>
+                    <a:lnR w="12700" cap="flat" cmpd="sng" algn="ctr">
+                      <a:solidFill>
+                        <a:srgbClr val="EEEEEE"/>
+                      </a:solidFill>
+                      <a:prstDash val="solid"/>
+                      <a:round/>
+                      <a:headEnd type="none" w="med" len="med"/>
+                      <a:tailEnd type="none" w="med" len="med"/>
+                    </a:lnR>
+                    <a:lnT w="12700" cap="flat" cmpd="sng" algn="ctr">
+                      <a:solidFill>
+                        <a:srgbClr val="EEEEEE"/>
+                      </a:solidFill>
+                      <a:prstDash val="solid"/>
+                      <a:round/>
+                      <a:headEnd type="none" w="med" len="med"/>
+                      <a:tailEnd type="none" w="med" len="med"/>
+                    </a:lnT>
+                    <a:lnB w="12700" cap="flat" cmpd="sng" algn="ctr">
+                      <a:solidFill>
+                        <a:srgbClr val="EEEEEE"/>
+                      </a:solidFill>
+                      <a:prstDash val="solid"/>
+                      <a:round/>
+                      <a:headEnd type="none" w="med" len="med"/>
+                      <a:tailEnd type="none" w="med" len="med"/>
+                    </a:lnB>
+                    <a:solidFill>
+                      <a:srgbClr val="FFFFFF"/>
+                    </a:solidFill>
+                  </a:tcPr>
+                </a:tc>
+                <a:tc>
+                  <a:txBody>
+                    <a:bodyPr/>
+                    <a:lstStyle/>
+                    <a:p>
+                      <a:pPr algn="l" indent="0" marL="0">
+                        <a:buNone/>
+                      </a:pPr>
+                      <a:r>
+                        <a:rPr lang="en-US" sz="1500" dirty="0">
+                          <a:solidFill>
+                            <a:srgbClr val="212121"/>
+                          </a:solidFill>
+                          <a:latin typeface="Arial" pitchFamily="34" charset="0"/>
+                          <a:ea typeface="Arial" pitchFamily="34" charset="-122"/>
+                          <a:cs typeface="Arial" pitchFamily="34" charset="-120"/>
+                        </a:rPr>
+                        <a:t>Realizar pedido ──▶ Iniciar sesión</a:t>
+                      </a:r>
+                      <a:endParaRPr lang="en-US" sz="1500" dirty="0">
+                        <a:latin typeface="Arial" charset="0"/>
+                        <a:ea typeface="Arial" charset="0"/>
+                        <a:cs typeface="Arial" charset="0"/>
+                      </a:endParaRPr>
+                    </a:p>
+                  </a:txBody>
+                  <a:tcPr marL="54864" marR="54864" marT="54864" marB="54864" anchor="ctr">
+                    <a:lnL w="12700" cap="flat" cmpd="sng" algn="ctr">
+                      <a:solidFill>
+                        <a:srgbClr val="EEEEEE"/>
+                      </a:solidFill>
+                      <a:prstDash val="solid"/>
+                      <a:round/>
+                      <a:headEnd type="none" w="med" len="med"/>
+                      <a:tailEnd type="none" w="med" len="med"/>
+                    </a:lnL>
+                    <a:lnR w="12700" cap="flat" cmpd="sng" algn="ctr">
+                      <a:solidFill>
+                        <a:srgbClr val="EEEEEE"/>
+                      </a:solidFill>
+                      <a:prstDash val="solid"/>
+                      <a:round/>
+                      <a:headEnd type="none" w="med" len="med"/>
+                      <a:tailEnd type="none" w="med" len="med"/>
+                    </a:lnR>
+                    <a:lnT w="12700" cap="flat" cmpd="sng" algn="ctr">
+                      <a:solidFill>
+                        <a:srgbClr val="EEEEEE"/>
+                      </a:solidFill>
+                      <a:prstDash val="solid"/>
+                      <a:round/>
+                      <a:headEnd type="none" w="med" len="med"/>
+                      <a:tailEnd type="none" w="med" len="med"/>
+                    </a:lnT>
+                    <a:lnB w="12700" cap="flat" cmpd="sng" algn="ctr">
+                      <a:solidFill>
+                        <a:srgbClr val="EEEEEE"/>
+                      </a:solidFill>
+                      <a:prstDash val="solid"/>
+                      <a:round/>
+                      <a:headEnd type="none" w="med" len="med"/>
+                      <a:tailEnd type="none" w="med" len="med"/>
+                    </a:lnB>
+                    <a:solidFill>
+                      <a:srgbClr val="FFFFFF"/>
+                    </a:solidFill>
+                  </a:tcPr>
+                </a:tc>
+              </a:tr>
+              <a:tr h="777240">
+                <a:tc>
+                  <a:txBody>
+                    <a:bodyPr/>
+                    <a:lstStyle/>
+                    <a:p>
+                      <a:pPr algn="l" indent="0" marL="0">
+                        <a:buNone/>
+                      </a:pPr>
+                      <a:r>
+                        <a:rPr lang="en-US" sz="1500" b="1" dirty="0">
+                          <a:solidFill>
+                            <a:srgbClr val="212121"/>
+                          </a:solidFill>
+                          <a:latin typeface="Arial" pitchFamily="34" charset="0"/>
+                          <a:ea typeface="Arial" pitchFamily="34" charset="-122"/>
+                          <a:cs typeface="Arial" pitchFamily="34" charset="-120"/>
+                        </a:rPr>
+                        <a:t>«extend»</a:t>
+                      </a:r>
+                      <a:endParaRPr lang="en-US" sz="1500" dirty="0">
+                        <a:latin typeface="Arial" charset="0"/>
+                        <a:ea typeface="Arial" charset="0"/>
+                        <a:cs typeface="Arial" charset="0"/>
+                      </a:endParaRPr>
+                    </a:p>
+                  </a:txBody>
+                  <a:tcPr marL="54864" marR="54864" marT="54864" marB="54864" anchor="ctr">
+                    <a:lnL w="12700" cap="flat" cmpd="sng" algn="ctr">
+                      <a:solidFill>
+                        <a:srgbClr val="EEEEEE"/>
+                      </a:solidFill>
+                      <a:prstDash val="solid"/>
+                      <a:round/>
+                      <a:headEnd type="none" w="med" len="med"/>
+                      <a:tailEnd type="none" w="med" len="med"/>
+                    </a:lnL>
+                    <a:lnR w="12700" cap="flat" cmpd="sng" algn="ctr">
+                      <a:solidFill>
+                        <a:srgbClr val="EEEEEE"/>
+                      </a:solidFill>
+                      <a:prstDash val="solid"/>
+                      <a:round/>
+                      <a:headEnd type="none" w="med" len="med"/>
+                      <a:tailEnd type="none" w="med" len="med"/>
+                    </a:lnR>
+                    <a:lnT w="12700" cap="flat" cmpd="sng" algn="ctr">
+                      <a:solidFill>
+                        <a:srgbClr val="EEEEEE"/>
+                      </a:solidFill>
+                      <a:prstDash val="solid"/>
+                      <a:round/>
+                      <a:headEnd type="none" w="med" len="med"/>
+                      <a:tailEnd type="none" w="med" len="med"/>
+                    </a:lnT>
+                    <a:lnB w="12700" cap="flat" cmpd="sng" algn="ctr">
+                      <a:solidFill>
+                        <a:srgbClr val="EEEEEE"/>
+                      </a:solidFill>
+                      <a:prstDash val="solid"/>
+                      <a:round/>
+                      <a:headEnd type="none" w="med" len="med"/>
+                      <a:tailEnd type="none" w="med" len="med"/>
+                    </a:lnB>
+                    <a:solidFill>
+                      <a:srgbClr val="F5F5F5"/>
+                    </a:solidFill>
+                  </a:tcPr>
+                </a:tc>
+                <a:tc>
+                  <a:txBody>
+                    <a:bodyPr/>
+                    <a:lstStyle/>
+                    <a:p>
+                      <a:pPr algn="l" indent="0" marL="0">
+                        <a:buNone/>
+                      </a:pPr>
+                      <a:r>
+                        <a:rPr lang="en-US" sz="1500" dirty="0">
+                          <a:solidFill>
+                            <a:srgbClr val="212121"/>
+                          </a:solidFill>
+                          <a:latin typeface="Arial" pitchFamily="34" charset="0"/>
+                          <a:ea typeface="Arial" pitchFamily="34" charset="-122"/>
+                          <a:cs typeface="Arial" pitchFamily="34" charset="-120"/>
+                        </a:rPr>
+                        <a:t>el caso BASE (el que se amplía)</a:t>
+                      </a:r>
+                      <a:endParaRPr lang="en-US" sz="1500" dirty="0">
+                        <a:latin typeface="Arial" charset="0"/>
+                        <a:ea typeface="Arial" charset="0"/>
+                        <a:cs typeface="Arial" charset="0"/>
+                      </a:endParaRPr>
+                    </a:p>
+                  </a:txBody>
+                  <a:tcPr marL="54864" marR="54864" marT="54864" marB="54864" anchor="ctr">
+                    <a:lnL w="12700" cap="flat" cmpd="sng" algn="ctr">
+                      <a:solidFill>
+                        <a:srgbClr val="EEEEEE"/>
+                      </a:solidFill>
+                      <a:prstDash val="solid"/>
+                      <a:round/>
+                      <a:headEnd type="none" w="med" len="med"/>
+                      <a:tailEnd type="none" w="med" len="med"/>
+                    </a:lnL>
+                    <a:lnR w="12700" cap="flat" cmpd="sng" algn="ctr">
+                      <a:solidFill>
+                        <a:srgbClr val="EEEEEE"/>
+                      </a:solidFill>
+                      <a:prstDash val="solid"/>
+                      <a:round/>
+                      <a:headEnd type="none" w="med" len="med"/>
+                      <a:tailEnd type="none" w="med" len="med"/>
+                    </a:lnR>
+                    <a:lnT w="12700" cap="flat" cmpd="sng" algn="ctr">
+                      <a:solidFill>
+                        <a:srgbClr val="EEEEEE"/>
+                      </a:solidFill>
+                      <a:prstDash val="solid"/>
+                      <a:round/>
+                      <a:headEnd type="none" w="med" len="med"/>
+                      <a:tailEnd type="none" w="med" len="med"/>
+                    </a:lnT>
+                    <a:lnB w="12700" cap="flat" cmpd="sng" algn="ctr">
+                      <a:solidFill>
+                        <a:srgbClr val="EEEEEE"/>
+                      </a:solidFill>
+                      <a:prstDash val="solid"/>
+                      <a:round/>
+                      <a:headEnd type="none" w="med" len="med"/>
+                      <a:tailEnd type="none" w="med" len="med"/>
+                    </a:lnB>
+                    <a:solidFill>
+                      <a:srgbClr val="F5F5F5"/>
+                    </a:solidFill>
+                  </a:tcPr>
+                </a:tc>
+                <a:tc>
+                  <a:txBody>
+                    <a:bodyPr/>
+                    <a:lstStyle/>
+                    <a:p>
+                      <a:pPr algn="l" indent="0" marL="0">
+                        <a:buNone/>
+                      </a:pPr>
+                      <a:r>
+                        <a:rPr lang="en-US" sz="1500" dirty="0">
+                          <a:solidFill>
+                            <a:srgbClr val="212121"/>
+                          </a:solidFill>
+                          <a:latin typeface="Arial" pitchFamily="34" charset="0"/>
+                          <a:ea typeface="Arial" pitchFamily="34" charset="-122"/>
+                          <a:cs typeface="Arial" pitchFamily="34" charset="-120"/>
+                        </a:rPr>
+                        <a:t>Aplicar cupón ──▶ Pagar pedido</a:t>
+                      </a:r>
+                      <a:endParaRPr lang="en-US" sz="1500" dirty="0">
+                        <a:latin typeface="Arial" charset="0"/>
+                        <a:ea typeface="Arial" charset="0"/>
+                        <a:cs typeface="Arial" charset="0"/>
+                      </a:endParaRPr>
+                    </a:p>
+                  </a:txBody>
+                  <a:tcPr marL="54864" marR="54864" marT="54864" marB="54864" anchor="ctr">
+                    <a:lnL w="12700" cap="flat" cmpd="sng" algn="ctr">
+                      <a:solidFill>
+                        <a:srgbClr val="EEEEEE"/>
+                      </a:solidFill>
+                      <a:prstDash val="solid"/>
+                      <a:round/>
+                      <a:headEnd type="none" w="med" len="med"/>
+                      <a:tailEnd type="none" w="med" len="med"/>
+                    </a:lnL>
+                    <a:lnR w="12700" cap="flat" cmpd="sng" algn="ctr">
+                      <a:solidFill>
+                        <a:srgbClr val="EEEEEE"/>
+                      </a:solidFill>
+                      <a:prstDash val="solid"/>
+                      <a:round/>
+                      <a:headEnd type="none" w="med" len="med"/>
+                      <a:tailEnd type="none" w="med" len="med"/>
+                    </a:lnR>
+                    <a:lnT w="12700" cap="flat" cmpd="sng" algn="ctr">
+                      <a:solidFill>
+                        <a:srgbClr val="EEEEEE"/>
+                      </a:solidFill>
+                      <a:prstDash val="solid"/>
+                      <a:round/>
+                      <a:headEnd type="none" w="med" len="med"/>
+                      <a:tailEnd type="none" w="med" len="med"/>
+                    </a:lnT>
+                    <a:lnB w="12700" cap="flat" cmpd="sng" algn="ctr">
+                      <a:solidFill>
+                        <a:srgbClr val="EEEEEE"/>
+                      </a:solidFill>
+                      <a:prstDash val="solid"/>
+                      <a:round/>
+                      <a:headEnd type="none" w="med" len="med"/>
+                      <a:tailEnd type="none" w="med" len="med"/>
+                    </a:lnB>
+                    <a:solidFill>
+                      <a:srgbClr val="F5F5F5"/>
+                    </a:solidFill>
+                  </a:tcPr>
+                </a:tc>
+              </a:tr>
+            </a:tbl>
+          </a:graphicData>
+        </a:graphic>
+      </p:graphicFrame>
+      <p:sp>
+        <p:nvSpPr>
+          <p:cNvPr id="5" name="Shape 2"/>
+          <p:cNvSpPr/>
+          <p:nvPr/>
+        </p:nvSpPr>
+        <p:spPr>
+          <a:xfrm>
+            <a:off x="548640" y="3657600"/>
+            <a:ext cx="11091672" cy="914400"/>
+          </a:xfrm>
+          <a:prstGeom prst="roundRect">
+            <a:avLst/>
+          </a:prstGeom>
+          <a:solidFill>
+            <a:srgbClr val="E0F2F1"/>
+          </a:solidFill>
+          <a:ln w="19050">
+            <a:solidFill>
+              <a:srgbClr val="009688"/>
+            </a:solidFill>
+            <a:prstDash val="solid"/>
+          </a:ln>
+        </p:spPr>
+      </p:sp>
+      <p:sp>
+        <p:nvSpPr>
+          <p:cNvPr id="6" name="Text 3"/>
+          <p:cNvSpPr/>
+          <p:nvPr/>
+        </p:nvSpPr>
+        <p:spPr>
+          <a:xfrm>
+            <a:off x="777240" y="3730752"/>
+            <a:ext cx="10634472" cy="768096"/>
+          </a:xfrm>
+          <a:prstGeom prst="rect">
+            <a:avLst/>
+          </a:prstGeom>
+          <a:noFill/>
+          <a:ln/>
+        </p:spPr>
+        <p:txBody>
+          <a:bodyPr wrap="square" rtlCol="0" anchor="ctr"/>
+          <a:lstStyle/>
+          <a:p>
+            <a:pPr indent="0" marL="0">
+              <a:buNone/>
+            </a:pPr>
+            <a:r>
+              <a:rPr lang="en-US" sz="1500" dirty="0">
+                <a:solidFill>
+                  <a:srgbClr val="212121"/>
+                </a:solidFill>
+                <a:latin typeface="Arial" pitchFamily="34" charset="0"/>
+                <a:ea typeface="Arial" pitchFamily="34" charset="-122"/>
+                <a:cs typeface="Arial" pitchFamily="34" charset="-120"/>
+              </a:rPr>
+              <a:t>Truco: la flecha siempre sale del caso que "manda ejecutar" hacia el que completa la historia. En include manda el grande; en extend, el opcional se ofrece al grande.</a:t>
+            </a:r>
+            <a:endParaRPr lang="en-US" sz="1500" dirty="0"/>
+          </a:p>
+        </p:txBody>
+      </p:sp>
+      <p:sp>
+        <p:nvSpPr>
+          <p:cNvPr id="7" name="Shape 4"/>
+          <p:cNvSpPr/>
+          <p:nvPr/>
+        </p:nvSpPr>
+        <p:spPr>
+          <a:xfrm>
+            <a:off x="548640" y="4846320"/>
+            <a:ext cx="11091672" cy="777240"/>
+          </a:xfrm>
+          <a:prstGeom prst="roundRect">
+            <a:avLst/>
+          </a:prstGeom>
+          <a:solidFill>
+            <a:srgbClr val="FFF8E1"/>
+          </a:solidFill>
+          <a:ln w="19050">
+            <a:solidFill>
+              <a:srgbClr val="F9A825"/>
+            </a:solidFill>
+            <a:prstDash val="solid"/>
+          </a:ln>
+        </p:spPr>
+      </p:sp>
+      <p:sp>
+        <p:nvSpPr>
+          <p:cNvPr id="8" name="Text 5"/>
+          <p:cNvSpPr/>
+          <p:nvPr/>
+        </p:nvSpPr>
+        <p:spPr>
+          <a:xfrm>
+            <a:off x="777240" y="4919472"/>
+            <a:ext cx="10634472" cy="630936"/>
+          </a:xfrm>
+          <a:prstGeom prst="rect">
+            <a:avLst/>
+          </a:prstGeom>
+          <a:noFill/>
+          <a:ln/>
+        </p:spPr>
+        <p:txBody>
+          <a:bodyPr wrap="square" rtlCol="0" anchor="ctr"/>
+          <a:lstStyle/>
+          <a:p>
+            <a:pPr indent="0" marL="0">
+              <a:buNone/>
+            </a:pPr>
+            <a:r>
+              <a:rPr lang="en-US" sz="1400" dirty="0">
+                <a:solidFill>
+                  <a:srgbClr val="212121"/>
+                </a:solidFill>
+                <a:latin typeface="Arial" pitchFamily="34" charset="0"/>
+                <a:ea typeface="Arial" pitchFamily="34" charset="-122"/>
+                <a:cs typeface="Arial" pitchFamily="34" charset="-120"/>
+              </a:rPr>
+              <a:t>Y no lo confundas con la dirección de la dependencia en clases: aquí la etiqueta «include»/«extend» es la que da el significado.</a:t>
+            </a:r>
+            <a:endParaRPr lang="en-US" sz="1400" dirty="0"/>
+          </a:p>
+        </p:txBody>
+      </p:sp>
+      <p:sp>
+        <p:nvSpPr>
+          <p:cNvPr id="9" name="Text 6"/>
+          <p:cNvSpPr/>
+          <p:nvPr/>
+        </p:nvSpPr>
+        <p:spPr>
+          <a:xfrm>
+            <a:off x="548640" y="6473952"/>
+            <a:ext cx="11091672" cy="292608"/>
+          </a:xfrm>
+          <a:prstGeom prst="rect">
+            <a:avLst/>
+          </a:prstGeom>
+          <a:noFill/>
+          <a:ln/>
+        </p:spPr>
+        <p:txBody>
+          <a:bodyPr wrap="square" rtlCol="0" anchor="ctr"/>
+          <a:lstStyle/>
+          <a:p>
+            <a:pPr algn="r" indent="0" marL="0">
+              <a:buNone/>
+            </a:pPr>
+            <a:r>
+              <a:rPr lang="en-US" sz="1100" dirty="0">
+                <a:solidFill>
+                  <a:srgbClr val="757575"/>
+                </a:solidFill>
+                <a:latin typeface="Arial" pitchFamily="34" charset="0"/>
+                <a:ea typeface="Arial" pitchFamily="34" charset="-122"/>
+                <a:cs typeface="Arial" pitchFamily="34" charset="-120"/>
+              </a:rPr>
+              <a:t>Entornos de Desarrollo — Tema 6 · Diagrama de casos de uso</a:t>
+            </a:r>
+            <a:endParaRPr lang="en-US" sz="1100" dirty="0"/>
+          </a:p>
+        </p:txBody>
+      </p:sp>
+    </p:spTree>
+  </p:cSld>
+  <p:clrMapOvr>
+    <a:masterClrMapping/>
+  </p:clrMapOvr>
+</p:sld>
+</file>
+
+<file path=ppt/slides/slide12.xml><?xml version="1.0" encoding="utf-8"?>
+<p:sld xmlns:a="http://schemas.openxmlformats.org/drawingml/2006/main" xmlns:r="http://schemas.openxmlformats.org/officeDocument/2006/relationships" xmlns:p="http://schemas.openxmlformats.org/presentationml/2006/main">
+  <p:cSld name="Slide 12">
+    <p:spTree>
+      <p:nvGrpSpPr>
+        <p:cNvPr id="1" name=""/>
+        <p:cNvGrpSpPr/>
+        <p:nvPr/>
+      </p:nvGrpSpPr>
+      <p:grpSpPr>
+        <a:xfrm>
+          <a:off x="0" y="0"/>
+          <a:ext cx="0" cy="0"/>
+          <a:chOff x="0" y="0"/>
+          <a:chExt cx="0" cy="0"/>
+        </a:xfrm>
+      </p:grpSpPr>
+      <p:sp>
+        <p:nvSpPr>
+          <p:cNvPr id="2" name="Shape 0"/>
+          <p:cNvSpPr/>
+          <p:nvPr/>
+        </p:nvSpPr>
+        <p:spPr>
+          <a:xfrm>
+            <a:off x="0" y="0"/>
+            <a:ext cx="12188952" cy="777240"/>
+          </a:xfrm>
+          <a:prstGeom prst="rect">
+            <a:avLst/>
+          </a:prstGeom>
+          <a:solidFill>
+            <a:srgbClr val="303F9F"/>
+          </a:solidFill>
+          <a:ln w="12700">
+            <a:solidFill>
+              <a:srgbClr val="303F9F"/>
+            </a:solidFill>
+            <a:prstDash val="solid"/>
+          </a:ln>
+        </p:spPr>
+      </p:sp>
+      <p:sp>
+        <p:nvSpPr>
+          <p:cNvPr id="3" name="Text 1"/>
+          <p:cNvSpPr/>
+          <p:nvPr/>
+        </p:nvSpPr>
+        <p:spPr>
+          <a:xfrm>
+            <a:off x="365760" y="0"/>
+            <a:ext cx="11457432" cy="777240"/>
+          </a:xfrm>
+          <a:prstGeom prst="rect">
+            <a:avLst/>
+          </a:prstGeom>
+          <a:noFill/>
+          <a:ln/>
+        </p:spPr>
+        <p:txBody>
+          <a:bodyPr wrap="square" rtlCol="0" anchor="ctr"/>
+          <a:lstStyle/>
+          <a:p>
+            <a:pPr indent="0" marL="0">
+              <a:buNone/>
+            </a:pPr>
+            <a:r>
+              <a:rPr lang="en-US" sz="2300" b="1" dirty="0">
+                <a:solidFill>
+                  <a:srgbClr val="FFFFFF"/>
+                </a:solidFill>
+                <a:latin typeface="Arial" pitchFamily="34" charset="0"/>
+                <a:ea typeface="Arial" pitchFamily="34" charset="-122"/>
+                <a:cs typeface="Arial" pitchFamily="34" charset="-120"/>
+              </a:rPr>
+              <a:t>Relaciones avanzadas: generalización</a:t>
+            </a:r>
+            <a:endParaRPr lang="en-US" sz="2300" dirty="0"/>
+          </a:p>
+        </p:txBody>
+      </p:sp>
+      <p:sp>
+        <p:nvSpPr>
+          <p:cNvPr id="4" name="Text 2"/>
+          <p:cNvSpPr/>
+          <p:nvPr/>
+        </p:nvSpPr>
+        <p:spPr>
+          <a:xfrm>
+            <a:off x="548640" y="1143000"/>
+            <a:ext cx="7863840" cy="3200400"/>
+          </a:xfrm>
+          <a:prstGeom prst="rect">
+            <a:avLst/>
+          </a:prstGeom>
+          <a:noFill/>
+          <a:ln/>
+        </p:spPr>
+        <p:txBody>
+          <a:bodyPr wrap="square" rtlCol="0" anchor="t"/>
+          <a:lstStyle/>
+          <a:p>
+            <a:pPr indent="0" marL="0">
+              <a:spcAft>
+                <a:spcPts val="800"/>
+              </a:spcAft>
+              <a:buNone/>
+            </a:pPr>
+            <a:r>
+              <a:rPr lang="en-US" sz="1600" dirty="0">
+                <a:solidFill>
+                  <a:srgbClr val="212121"/>
+                </a:solidFill>
+                <a:latin typeface="Arial" pitchFamily="34" charset="0"/>
+                <a:ea typeface="Arial" pitchFamily="34" charset="-122"/>
+                <a:cs typeface="Arial" pitchFamily="34" charset="-120"/>
+              </a:rPr>
+              <a:t>•  Funciona igual que la herencia del tema 5: el hijo hereda el comportamiento del padre y puede añadir o modificar.</a:t>
+            </a:r>
+            <a:endParaRPr lang="en-US" sz="1600" dirty="0"/>
+          </a:p>
+          <a:p>
+            <a:pPr indent="0" marL="0">
+              <a:spcAft>
+                <a:spcPts val="800"/>
+              </a:spcAft>
+              <a:buNone/>
+            </a:pPr>
+            <a:r>
+              <a:rPr lang="en-US" sz="1600" dirty="0">
+                <a:solidFill>
+                  <a:srgbClr val="212121"/>
+                </a:solidFill>
+                <a:latin typeface="Arial" pitchFamily="34" charset="0"/>
+                <a:ea typeface="Arial" pitchFamily="34" charset="-122"/>
+                <a:cs typeface="Arial" pitchFamily="34" charset="-120"/>
+              </a:rPr>
+              <a:t>•  Entre CASOS DE USO: varios casos comparten un comportamiento base.</a:t>
+            </a:r>
+            <a:endParaRPr lang="en-US" sz="1600" dirty="0"/>
+          </a:p>
+          <a:p>
+            <a:pPr indent="0" marL="0">
+              <a:spcAft>
+                <a:spcPts val="800"/>
+              </a:spcAft>
+              <a:buNone/>
+            </a:pPr>
+            <a:r>
+              <a:rPr lang="en-US" sz="1600" dirty="0">
+                <a:solidFill>
+                  <a:srgbClr val="212121"/>
+                </a:solidFill>
+                <a:latin typeface="Arial" pitchFamily="34" charset="0"/>
+                <a:ea typeface="Arial" pitchFamily="34" charset="-122"/>
+                <a:cs typeface="Arial" pitchFamily="34" charset="-120"/>
+              </a:rPr>
+              <a:t>•  Entre ACTORES: un actor hereda los casos de uso de otro. Ejemplo: Administrador hereda todo lo que puede hacer Usuario y añade los suyos propios.</a:t>
+            </a:r>
+            <a:endParaRPr lang="en-US" sz="1600" dirty="0"/>
+          </a:p>
+          <a:p>
+            <a:pPr indent="0" marL="0">
+              <a:spcAft>
+                <a:spcPts val="800"/>
+              </a:spcAft>
+              <a:buNone/>
+            </a:pPr>
+            <a:r>
+              <a:rPr lang="en-US" sz="1600" dirty="0">
+                <a:solidFill>
+                  <a:srgbClr val="212121"/>
+                </a:solidFill>
+                <a:latin typeface="Arial" pitchFamily="34" charset="0"/>
+                <a:ea typeface="Arial" pitchFamily="34" charset="-122"/>
+                <a:cs typeface="Arial" pitchFamily="34" charset="-120"/>
+              </a:rPr>
+              <a:t>•  Se dibuja con la misma flecha de triángulo hueco de los diagramas de clases, apuntando al padre.</a:t>
+            </a:r>
+            <a:endParaRPr lang="en-US" sz="1600" dirty="0"/>
+          </a:p>
+        </p:txBody>
+      </p:sp>
+      <p:sp>
+        <p:nvSpPr>
+          <p:cNvPr id="5" name="Shape 3"/>
+          <p:cNvSpPr/>
+          <p:nvPr/>
+        </p:nvSpPr>
+        <p:spPr>
+          <a:xfrm>
+            <a:off x="9052560" y="1234440"/>
+            <a:ext cx="1417320" cy="2505456"/>
+          </a:xfrm>
+          <a:prstGeom prst="rect">
+            <a:avLst/>
+          </a:prstGeom>
+          <a:ln w="12700">
+            <a:solidFill>
+              <a:srgbClr val="EEEEEE"/>
+            </a:solidFill>
+            <a:prstDash val="solid"/>
+          </a:ln>
+        </p:spPr>
+      </p:sp>
+      <p:pic>
+        <p:nvPicPr>
+          <p:cNvPr id="6" name="Image 0" descr="C:/Users/Aitor/Documents/apuntes-profe/entornos-de-desarrollo/docs/tema6/img/dia-generalizacion-paleta.png">    </p:cNvPr>
+          <p:cNvPicPr>
+            <a:picLocks noChangeAspect="1"/>
+          </p:cNvPicPr>
+          <p:nvPr/>
+        </p:nvPicPr>
+        <p:blipFill>
+          <a:blip r:embed="rId1"/>
+          <a:stretch>
+            <a:fillRect/>
+          </a:stretch>
+        </p:blipFill>
+        <p:spPr>
+          <a:xfrm>
+            <a:off x="9052560" y="1234440"/>
+            <a:ext cx="1417320" cy="2505456"/>
+          </a:xfrm>
+          <a:prstGeom prst="rect">
+            <a:avLst/>
+          </a:prstGeom>
+        </p:spPr>
+      </p:pic>
+      <p:sp>
+        <p:nvSpPr>
+          <p:cNvPr id="7" name="Text 4"/>
+          <p:cNvSpPr/>
+          <p:nvPr/>
+        </p:nvSpPr>
+        <p:spPr>
+          <a:xfrm>
+            <a:off x="8778240" y="3767328"/>
+            <a:ext cx="1965960" cy="320040"/>
+          </a:xfrm>
+          <a:prstGeom prst="rect">
+            <a:avLst/>
+          </a:prstGeom>
+          <a:noFill/>
+          <a:ln/>
+        </p:spPr>
+        <p:txBody>
+          <a:bodyPr wrap="square" rtlCol="0" anchor="t"/>
+          <a:lstStyle/>
+          <a:p>
+            <a:pPr algn="ctr" indent="0" marL="0">
+              <a:buNone/>
+            </a:pPr>
+            <a:r>
+              <a:rPr lang="en-US" sz="1000" i="1" dirty="0">
+                <a:solidFill>
+                  <a:srgbClr val="757575"/>
+                </a:solidFill>
+                <a:latin typeface="Arial" pitchFamily="34" charset="0"/>
+                <a:ea typeface="Arial" pitchFamily="34" charset="-122"/>
+                <a:cs typeface="Arial" pitchFamily="34" charset="-120"/>
+              </a:rPr>
+              <a:t>Icono de generalización en la paleta UML de DIA</a:t>
+            </a:r>
+            <a:endParaRPr lang="en-US" sz="1000" dirty="0"/>
+          </a:p>
+        </p:txBody>
+      </p:sp>
+      <p:sp>
+        <p:nvSpPr>
+          <p:cNvPr id="8" name="Shape 5"/>
+          <p:cNvSpPr/>
+          <p:nvPr/>
+        </p:nvSpPr>
+        <p:spPr>
+          <a:xfrm>
+            <a:off x="548640" y="4663440"/>
+            <a:ext cx="11091672" cy="914400"/>
+          </a:xfrm>
+          <a:prstGeom prst="roundRect">
+            <a:avLst/>
+          </a:prstGeom>
+          <a:solidFill>
+            <a:srgbClr val="E0F2F1"/>
+          </a:solidFill>
+          <a:ln w="19050">
+            <a:solidFill>
+              <a:srgbClr val="009688"/>
+            </a:solidFill>
+            <a:prstDash val="solid"/>
+          </a:ln>
+        </p:spPr>
+      </p:sp>
+      <p:sp>
+        <p:nvSpPr>
+          <p:cNvPr id="9" name="Text 6"/>
+          <p:cNvSpPr/>
+          <p:nvPr/>
+        </p:nvSpPr>
+        <p:spPr>
+          <a:xfrm>
+            <a:off x="777240" y="4736592"/>
+            <a:ext cx="10634472" cy="768096"/>
+          </a:xfrm>
+          <a:prstGeom prst="rect">
+            <a:avLst/>
+          </a:prstGeom>
+          <a:noFill/>
+          <a:ln/>
+        </p:spPr>
+        <p:txBody>
+          <a:bodyPr wrap="square" rtlCol="0" anchor="ctr"/>
+          <a:lstStyle/>
+          <a:p>
+            <a:pPr indent="0" marL="0">
+              <a:buNone/>
+            </a:pPr>
+            <a:r>
+              <a:rPr lang="en-US" sz="1500" dirty="0">
+                <a:solidFill>
+                  <a:srgbClr val="212121"/>
+                </a:solidFill>
+                <a:latin typeface="Arial" pitchFamily="34" charset="0"/>
+                <a:ea typeface="Arial" pitchFamily="34" charset="-122"/>
+                <a:cs typeface="Arial" pitchFamily="34" charset="-120"/>
+              </a:rPr>
+              <a:t>Cuándo usarla entre actores: si te descubres repitiendo las mismas líneas de comunicación para dos actores, probablemente uno generaliza al otro.</a:t>
+            </a:r>
+            <a:endParaRPr lang="en-US" sz="1500" dirty="0"/>
+          </a:p>
+        </p:txBody>
+      </p:sp>
+      <p:sp>
+        <p:nvSpPr>
+          <p:cNvPr id="10" name="Text 7"/>
+          <p:cNvSpPr/>
+          <p:nvPr/>
+        </p:nvSpPr>
+        <p:spPr>
+          <a:xfrm>
+            <a:off x="548640" y="6473952"/>
+            <a:ext cx="11091672" cy="292608"/>
+          </a:xfrm>
+          <a:prstGeom prst="rect">
+            <a:avLst/>
+          </a:prstGeom>
+          <a:noFill/>
+          <a:ln/>
+        </p:spPr>
+        <p:txBody>
+          <a:bodyPr wrap="square" rtlCol="0" anchor="ctr"/>
+          <a:lstStyle/>
+          <a:p>
+            <a:pPr algn="r" indent="0" marL="0">
+              <a:buNone/>
+            </a:pPr>
+            <a:r>
+              <a:rPr lang="en-US" sz="1100" dirty="0">
+                <a:solidFill>
+                  <a:srgbClr val="757575"/>
+                </a:solidFill>
+                <a:latin typeface="Arial" pitchFamily="34" charset="0"/>
+                <a:ea typeface="Arial" pitchFamily="34" charset="-122"/>
+                <a:cs typeface="Arial" pitchFamily="34" charset="-120"/>
+              </a:rPr>
+              <a:t>Entornos de Desarrollo — Tema 6 · Diagrama de casos de uso</a:t>
+            </a:r>
+            <a:endParaRPr lang="en-US" sz="1100" dirty="0"/>
+          </a:p>
+        </p:txBody>
+      </p:sp>
+    </p:spTree>
+  </p:cSld>
+  <p:clrMapOvr>
+    <a:masterClrMapping/>
+  </p:clrMapOvr>
+</p:sld>
+</file>
+
+<file path=ppt/slides/slide13.xml><?xml version="1.0" encoding="utf-8"?>
+<p:sld xmlns:a="http://schemas.openxmlformats.org/drawingml/2006/main" xmlns:r="http://schemas.openxmlformats.org/officeDocument/2006/relationships" xmlns:p="http://schemas.openxmlformats.org/presentationml/2006/main">
+  <p:cSld name="Slide 13">
+    <p:spTree>
+      <p:nvGrpSpPr>
+        <p:cNvPr id="1" name=""/>
+        <p:cNvGrpSpPr/>
+        <p:nvPr/>
+      </p:nvGrpSpPr>
+      <p:grpSpPr>
+        <a:xfrm>
+          <a:off x="0" y="0"/>
+          <a:ext cx="0" cy="0"/>
+          <a:chOff x="0" y="0"/>
+          <a:chExt cx="0" cy="0"/>
+        </a:xfrm>
+      </p:grpSpPr>
+      <p:sp>
+        <p:nvSpPr>
+          <p:cNvPr id="2" name="Shape 0"/>
+          <p:cNvSpPr/>
+          <p:nvPr/>
+        </p:nvSpPr>
+        <p:spPr>
+          <a:xfrm>
+            <a:off x="0" y="0"/>
+            <a:ext cx="12188952" cy="777240"/>
+          </a:xfrm>
+          <a:prstGeom prst="rect">
+            <a:avLst/>
+          </a:prstGeom>
+          <a:solidFill>
+            <a:srgbClr val="303F9F"/>
+          </a:solidFill>
+          <a:ln w="12700">
+            <a:solidFill>
+              <a:srgbClr val="303F9F"/>
+            </a:solidFill>
+            <a:prstDash val="solid"/>
+          </a:ln>
+        </p:spPr>
+      </p:sp>
+      <p:sp>
+        <p:nvSpPr>
+          <p:cNvPr id="3" name="Text 1"/>
+          <p:cNvSpPr/>
+          <p:nvPr/>
+        </p:nvSpPr>
+        <p:spPr>
+          <a:xfrm>
+            <a:off x="365760" y="0"/>
+            <a:ext cx="11457432" cy="777240"/>
+          </a:xfrm>
+          <a:prstGeom prst="rect">
+            <a:avLst/>
+          </a:prstGeom>
+          <a:noFill/>
+          <a:ln/>
+        </p:spPr>
+        <p:txBody>
+          <a:bodyPr wrap="square" rtlCol="0" anchor="ctr"/>
+          <a:lstStyle/>
+          <a:p>
+            <a:pPr indent="0" marL="0">
+              <a:buNone/>
+            </a:pPr>
+            <a:r>
+              <a:rPr lang="en-US" sz="2300" b="1" dirty="0">
+                <a:solidFill>
+                  <a:srgbClr val="FFFFFF"/>
+                </a:solidFill>
+                <a:latin typeface="Arial" pitchFamily="34" charset="0"/>
+                <a:ea typeface="Arial" pitchFamily="34" charset="-122"/>
+                <a:cs typeface="Arial" pitchFamily="34" charset="-120"/>
+              </a:rPr>
+              <a:t>Recomendaciones</a:t>
+            </a:r>
+            <a:endParaRPr lang="en-US" sz="2300" dirty="0"/>
+          </a:p>
+        </p:txBody>
+      </p:sp>
+      <p:sp>
+        <p:nvSpPr>
+          <p:cNvPr id="4" name="Text 2"/>
+          <p:cNvSpPr/>
+          <p:nvPr/>
+        </p:nvSpPr>
+        <p:spPr>
+          <a:xfrm>
+            <a:off x="548640" y="1097280"/>
+            <a:ext cx="11091672" cy="3108960"/>
+          </a:xfrm>
+          <a:prstGeom prst="rect">
+            <a:avLst/>
+          </a:prstGeom>
+          <a:noFill/>
+          <a:ln/>
+        </p:spPr>
+        <p:txBody>
+          <a:bodyPr wrap="square" rtlCol="0" anchor="t"/>
+          <a:lstStyle/>
+          <a:p>
+            <a:pPr indent="0" marL="0">
+              <a:spcAft>
+                <a:spcPts val="800"/>
+              </a:spcAft>
+              <a:buNone/>
+            </a:pPr>
+            <a:r>
+              <a:rPr lang="en-US" sz="1600" dirty="0">
+                <a:solidFill>
+                  <a:srgbClr val="212121"/>
+                </a:solidFill>
+                <a:latin typeface="Arial" pitchFamily="34" charset="0"/>
+                <a:ea typeface="Arial" pitchFamily="34" charset="-122"/>
+                <a:cs typeface="Arial" pitchFamily="34" charset="-120"/>
+              </a:rPr>
+              <a:t>•  Los casos de uso describen las interacciones más importantes con el sistema, no su funcionamiento interno.</a:t>
+            </a:r>
+            <a:endParaRPr lang="en-US" sz="1600" dirty="0"/>
+          </a:p>
+          <a:p>
+            <a:pPr indent="0" marL="0">
+              <a:spcAft>
+                <a:spcPts val="800"/>
+              </a:spcAft>
+              <a:buNone/>
+            </a:pPr>
+            <a:r>
+              <a:rPr lang="en-US" sz="1600" dirty="0">
+                <a:solidFill>
+                  <a:srgbClr val="212121"/>
+                </a:solidFill>
+                <a:latin typeface="Arial" pitchFamily="34" charset="0"/>
+                <a:ea typeface="Arial" pitchFamily="34" charset="-122"/>
+                <a:cs typeface="Arial" pitchFamily="34" charset="-120"/>
+              </a:rPr>
+              <a:t>•  Mantén el diagrama lo más simple posible: todo el mundo (incluidos clientes sin perfil técnico) debe entenderlo.</a:t>
+            </a:r>
+            <a:endParaRPr lang="en-US" sz="1600" dirty="0"/>
+          </a:p>
+          <a:p>
+            <a:pPr indent="0" marL="0">
+              <a:spcAft>
+                <a:spcPts val="800"/>
+              </a:spcAft>
+              <a:buNone/>
+            </a:pPr>
+            <a:r>
+              <a:rPr lang="en-US" sz="1600" dirty="0">
+                <a:solidFill>
+                  <a:srgbClr val="212121"/>
+                </a:solidFill>
+                <a:latin typeface="Arial" pitchFamily="34" charset="0"/>
+                <a:ea typeface="Arial" pitchFamily="34" charset="-122"/>
+                <a:cs typeface="Arial" pitchFamily="34" charset="-120"/>
+              </a:rPr>
+              <a:t>•  No abuses de «include» para descomponer cada caso en sub-casos: los requisitos cambian y cada descomposición de hoy puede quedar obsoleta mañana.</a:t>
+            </a:r>
+            <a:endParaRPr lang="en-US" sz="1600" dirty="0"/>
+          </a:p>
+          <a:p>
+            <a:pPr indent="0" marL="0">
+              <a:spcAft>
+                <a:spcPts val="800"/>
+              </a:spcAft>
+              <a:buNone/>
+            </a:pPr>
+            <a:r>
+              <a:rPr lang="en-US" sz="1600" dirty="0">
+                <a:solidFill>
+                  <a:srgbClr val="212121"/>
+                </a:solidFill>
+                <a:latin typeface="Arial" pitchFamily="34" charset="0"/>
+                <a:ea typeface="Arial" pitchFamily="34" charset="-122"/>
+                <a:cs typeface="Arial" pitchFamily="34" charset="-120"/>
+              </a:rPr>
+              <a:t>•  Acompaña siempre el diagrama con la descripción narrativa de cada caso de uso: quién lo inicia, escenario principal, escenarios alternativos.</a:t>
+            </a:r>
+            <a:endParaRPr lang="en-US" sz="1600" dirty="0"/>
+          </a:p>
+        </p:txBody>
+      </p:sp>
+      <p:sp>
+        <p:nvSpPr>
+          <p:cNvPr id="5" name="Shape 3"/>
+          <p:cNvSpPr/>
+          <p:nvPr/>
+        </p:nvSpPr>
+        <p:spPr>
+          <a:xfrm>
+            <a:off x="548640" y="4754880"/>
+            <a:ext cx="11091672" cy="868680"/>
+          </a:xfrm>
+          <a:prstGeom prst="roundRect">
+            <a:avLst/>
+          </a:prstGeom>
+          <a:solidFill>
+            <a:srgbClr val="FFF8E1"/>
+          </a:solidFill>
+          <a:ln w="19050">
+            <a:solidFill>
+              <a:srgbClr val="F9A825"/>
+            </a:solidFill>
+            <a:prstDash val="solid"/>
+          </a:ln>
+        </p:spPr>
+      </p:sp>
+      <p:sp>
+        <p:nvSpPr>
+          <p:cNvPr id="6" name="Text 4"/>
+          <p:cNvSpPr/>
+          <p:nvPr/>
+        </p:nvSpPr>
+        <p:spPr>
+          <a:xfrm>
+            <a:off x="777240" y="4828032"/>
+            <a:ext cx="10634472" cy="722376"/>
+          </a:xfrm>
+          <a:prstGeom prst="rect">
+            <a:avLst/>
+          </a:prstGeom>
+          <a:noFill/>
+          <a:ln/>
+        </p:spPr>
+        <p:txBody>
+          <a:bodyPr wrap="square" rtlCol="0" anchor="ctr"/>
+          <a:lstStyle/>
+          <a:p>
+            <a:pPr indent="0" marL="0">
+              <a:buNone/>
+            </a:pPr>
+            <a:r>
+              <a:rPr lang="en-US" sz="1400" dirty="0">
+                <a:solidFill>
+                  <a:srgbClr val="212121"/>
+                </a:solidFill>
+                <a:latin typeface="Arial" pitchFamily="34" charset="0"/>
+                <a:ea typeface="Arial" pitchFamily="34" charset="-122"/>
+                <a:cs typeface="Arial" pitchFamily="34" charset="-120"/>
+              </a:rPr>
+              <a:t>Error frecuente: incluir pasos del flujo interno ("Conectar a la base de datos", "Validar token"). Esos detalles no los ve el usuario y no pertenecen aquí.</a:t>
+            </a:r>
+            <a:endParaRPr lang="en-US" sz="1400" dirty="0"/>
+          </a:p>
+        </p:txBody>
+      </p:sp>
+      <p:sp>
+        <p:nvSpPr>
+          <p:cNvPr id="7" name="Text 5"/>
+          <p:cNvSpPr/>
+          <p:nvPr/>
+        </p:nvSpPr>
+        <p:spPr>
+          <a:xfrm>
+            <a:off x="548640" y="6473952"/>
+            <a:ext cx="11091672" cy="292608"/>
+          </a:xfrm>
+          <a:prstGeom prst="rect">
+            <a:avLst/>
+          </a:prstGeom>
+          <a:noFill/>
+          <a:ln/>
+        </p:spPr>
+        <p:txBody>
+          <a:bodyPr wrap="square" rtlCol="0" anchor="ctr"/>
+          <a:lstStyle/>
+          <a:p>
+            <a:pPr algn="r" indent="0" marL="0">
+              <a:buNone/>
+            </a:pPr>
+            <a:r>
+              <a:rPr lang="en-US" sz="1100" dirty="0">
+                <a:solidFill>
+                  <a:srgbClr val="757575"/>
+                </a:solidFill>
+                <a:latin typeface="Arial" pitchFamily="34" charset="0"/>
+                <a:ea typeface="Arial" pitchFamily="34" charset="-122"/>
+                <a:cs typeface="Arial" pitchFamily="34" charset="-120"/>
+              </a:rPr>
+              <a:t>Entornos de Desarrollo — Tema 6 · Diagrama de casos de uso</a:t>
+            </a:r>
+            <a:endParaRPr lang="en-US" sz="1100" dirty="0"/>
+          </a:p>
+        </p:txBody>
+      </p:sp>
+    </p:spTree>
+  </p:cSld>
+  <p:clrMapOvr>
+    <a:masterClrMapping/>
+  </p:clrMapOvr>
+</p:sld>
+</file>
+
+<file path=ppt/slides/slide14.xml><?xml version="1.0" encoding="utf-8"?>
+<p:sld xmlns:a="http://schemas.openxmlformats.org/drawingml/2006/main" xmlns:r="http://schemas.openxmlformats.org/officeDocument/2006/relationships" xmlns:p="http://schemas.openxmlformats.org/presentationml/2006/main">
+  <p:cSld name="Slide 14">
+    <p:spTree>
+      <p:nvGrpSpPr>
+        <p:cNvPr id="1" name=""/>
+        <p:cNvGrpSpPr/>
+        <p:nvPr/>
+      </p:nvGrpSpPr>
+      <p:grpSpPr>
+        <a:xfrm>
+          <a:off x="0" y="0"/>
+          <a:ext cx="0" cy="0"/>
+          <a:chOff x="0" y="0"/>
+          <a:chExt cx="0" cy="0"/>
+        </a:xfrm>
+      </p:grpSpPr>
+      <p:sp>
+        <p:nvSpPr>
+          <p:cNvPr id="2" name="Shape 0"/>
+          <p:cNvSpPr/>
+          <p:nvPr/>
+        </p:nvSpPr>
+        <p:spPr>
+          <a:xfrm>
+            <a:off x="0" y="0"/>
+            <a:ext cx="12188952" cy="777240"/>
+          </a:xfrm>
+          <a:prstGeom prst="rect">
+            <a:avLst/>
+          </a:prstGeom>
+          <a:solidFill>
+            <a:srgbClr val="303F9F"/>
+          </a:solidFill>
+          <a:ln w="12700">
+            <a:solidFill>
+              <a:srgbClr val="303F9F"/>
+            </a:solidFill>
+            <a:prstDash val="solid"/>
+          </a:ln>
+        </p:spPr>
+      </p:sp>
+      <p:sp>
+        <p:nvSpPr>
+          <p:cNvPr id="3" name="Text 1"/>
+          <p:cNvSpPr/>
+          <p:nvPr/>
+        </p:nvSpPr>
+        <p:spPr>
+          <a:xfrm>
+            <a:off x="365760" y="0"/>
+            <a:ext cx="11457432" cy="777240"/>
+          </a:xfrm>
+          <a:prstGeom prst="rect">
+            <a:avLst/>
+          </a:prstGeom>
+          <a:noFill/>
+          <a:ln/>
+        </p:spPr>
+        <p:txBody>
+          <a:bodyPr wrap="square" rtlCol="0" anchor="ctr"/>
+          <a:lstStyle/>
+          <a:p>
+            <a:pPr indent="0" marL="0">
+              <a:buNone/>
+            </a:pPr>
+            <a:r>
+              <a:rPr lang="en-US" sz="2300" b="1" dirty="0">
+                <a:solidFill>
+                  <a:srgbClr val="FFFFFF"/>
+                </a:solidFill>
+                <a:latin typeface="Arial" pitchFamily="34" charset="0"/>
+                <a:ea typeface="Arial" pitchFamily="34" charset="-122"/>
+                <a:cs typeface="Arial" pitchFamily="34" charset="-120"/>
+              </a:rPr>
+              <a:t>Resumen de relaciones</a:t>
+            </a:r>
+            <a:endParaRPr lang="en-US" sz="2300" dirty="0"/>
+          </a:p>
+        </p:txBody>
+      </p:sp>
+      <p:graphicFrame>
+        <p:nvGraphicFramePr>
+          <p:cNvPr id="15" name="Table 0"/>
           <p:cNvGraphicFramePr>
             <a:graphicFrameLocks noGrp="1"/>
           </p:cNvGraphicFramePr>
@@ -3890,7 +5780,7 @@
         <p:spPr>
           <a:xfrm>
             <a:off x="548640" y="1600200"/>
-            <a:ext cx="5394960" cy="2377440"/>
+            <a:ext cx="5394960" cy="1965960"/>
           </a:xfrm>
           <a:prstGeom prst="rect">
             <a:avLst/>
@@ -3971,6 +5861,91 @@
         </p:nvSpPr>
         <p:spPr>
           <a:xfrm>
+            <a:off x="2331720" y="3611880"/>
+            <a:ext cx="1417320" cy="1115568"/>
+          </a:xfrm>
+          <a:prstGeom prst="rect">
+            <a:avLst/>
+          </a:prstGeom>
+          <a:ln w="12700">
+            <a:solidFill>
+              <a:srgbClr val="EEEEEE"/>
+            </a:solidFill>
+            <a:prstDash val="solid"/>
+          </a:ln>
+        </p:spPr>
+      </p:sp>
+      <p:pic>
+        <p:nvPicPr>
+          <p:cNvPr id="8" name="Image 0" descr="C:/Users/Aitor/Documents/apuntes-profe/entornos-de-desarrollo/docs/tema6/img/casos-actor-icono.png">    </p:cNvPr>
+          <p:cNvPicPr>
+            <a:picLocks noChangeAspect="1"/>
+          </p:cNvPicPr>
+          <p:nvPr/>
+        </p:nvPicPr>
+        <p:blipFill>
+          <a:blip r:embed="rId1"/>
+          <a:stretch>
+            <a:fillRect/>
+          </a:stretch>
+        </p:blipFill>
+        <p:spPr>
+          <a:xfrm>
+            <a:off x="2331720" y="3611880"/>
+            <a:ext cx="1417320" cy="1115568"/>
+          </a:xfrm>
+          <a:prstGeom prst="rect">
+            <a:avLst/>
+          </a:prstGeom>
+        </p:spPr>
+      </p:pic>
+      <p:sp>
+        <p:nvSpPr>
+          <p:cNvPr id="9" name="Text 6"/>
+          <p:cNvSpPr/>
+          <p:nvPr/>
+        </p:nvSpPr>
+        <p:spPr>
+          <a:xfrm>
+            <a:off x="2057400" y="4754880"/>
+            <a:ext cx="1965960" cy="320040"/>
+          </a:xfrm>
+          <a:prstGeom prst="rect">
+            <a:avLst/>
+          </a:prstGeom>
+          <a:noFill/>
+          <a:ln/>
+        </p:spPr>
+        <p:txBody>
+          <a:bodyPr wrap="square" rtlCol="0" anchor="t"/>
+          <a:lstStyle/>
+          <a:p>
+            <a:pPr algn="ctr" indent="0" marL="0">
+              <a:buNone/>
+            </a:pPr>
+            <a:r>
+              <a:rPr lang="en-US" sz="1000" i="1" dirty="0">
+                <a:solidFill>
+                  <a:srgbClr val="757575"/>
+                </a:solidFill>
+                <a:latin typeface="Arial" pitchFamily="34" charset="0"/>
+                <a:ea typeface="Arial" pitchFamily="34" charset="-122"/>
+                <a:cs typeface="Arial" pitchFamily="34" charset="-120"/>
+              </a:rPr>
+              <a:t>Icono de actor en la paleta UML de DIA</a:t>
+            </a:r>
+            <a:endParaRPr lang="en-US" sz="1000" dirty="0"/>
+          </a:p>
+        </p:txBody>
+      </p:sp>
+      <p:sp>
+        <p:nvSpPr>
+          <p:cNvPr id="10" name="Shape 7"/>
+          <p:cNvSpPr/>
+          <p:nvPr/>
+        </p:nvSpPr>
+        <p:spPr>
+          <a:xfrm>
             <a:off x="6263640" y="1051560"/>
             <a:ext cx="5394960" cy="411480"/>
           </a:xfrm>
@@ -3990,7 +5965,7 @@
       </p:sp>
       <p:sp>
         <p:nvSpPr>
-          <p:cNvPr id="8" name="Text 6"/>
+          <p:cNvPr id="11" name="Text 8"/>
           <p:cNvSpPr/>
           <p:nvPr/>
         </p:nvSpPr>
@@ -4029,14 +6004,14 @@
       </p:sp>
       <p:sp>
         <p:nvSpPr>
-          <p:cNvPr id="9" name="Text 7"/>
+          <p:cNvPr id="12" name="Text 9"/>
           <p:cNvSpPr/>
           <p:nvPr/>
         </p:nvSpPr>
         <p:spPr>
           <a:xfrm>
             <a:off x="6263640" y="1600200"/>
-            <a:ext cx="5394960" cy="2377440"/>
+            <a:ext cx="5394960" cy="1965960"/>
           </a:xfrm>
           <a:prstGeom prst="rect">
             <a:avLst/>
@@ -4103,7 +6078,7 @@
                 <a:ea typeface="Arial" pitchFamily="34" charset="-122"/>
                 <a:cs typeface="Arial" pitchFamily="34" charset="-120"/>
               </a:rPr>
-              <a:t>•  Cada camino concreto por el que puede transcurrir es un ESCENARIO: el principal (todo va bien) y los alternativos (PIN incorrecto, sin stock...).</a:t>
+              <a:t>•  Cada escenario es un camino: el principal (todo va bien) y los alternativos (PIN incorrecto, sin stock...).</a:t>
             </a:r>
             <a:endParaRPr lang="en-US" sz="1400" dirty="0"/>
           </a:p>
@@ -4111,39 +6086,60 @@
       </p:sp>
       <p:sp>
         <p:nvSpPr>
-          <p:cNvPr id="10" name="Shape 8"/>
-          <p:cNvSpPr/>
-          <p:nvPr/>
-        </p:nvSpPr>
-        <p:spPr>
-          <a:xfrm>
-            <a:off x="548640" y="4389120"/>
-            <a:ext cx="11091672" cy="1005840"/>
-          </a:xfrm>
-          <a:prstGeom prst="roundRect">
-            <a:avLst/>
-          </a:prstGeom>
-          <a:solidFill>
-            <a:srgbClr val="E0F2F1"/>
-          </a:solidFill>
-          <a:ln w="19050">
+          <p:cNvPr id="13" name="Shape 10"/>
+          <p:cNvSpPr/>
+          <p:nvPr/>
+        </p:nvSpPr>
+        <p:spPr>
+          <a:xfrm>
+            <a:off x="8595360" y="3611880"/>
+            <a:ext cx="1417320" cy="1078992"/>
+          </a:xfrm>
+          <a:prstGeom prst="rect">
+            <a:avLst/>
+          </a:prstGeom>
+          <a:ln w="12700">
             <a:solidFill>
-              <a:srgbClr val="009688"/>
+              <a:srgbClr val="EEEEEE"/>
             </a:solidFill>
             <a:prstDash val="solid"/>
           </a:ln>
         </p:spPr>
       </p:sp>
-      <p:sp>
-        <p:nvSpPr>
-          <p:cNvPr id="11" name="Text 9"/>
-          <p:cNvSpPr/>
-          <p:nvPr/>
-        </p:nvSpPr>
-        <p:spPr>
-          <a:xfrm>
-            <a:off x="777240" y="4462272"/>
-            <a:ext cx="10634472" cy="859536"/>
+      <p:pic>
+        <p:nvPicPr>
+          <p:cNvPr id="14" name="Image 1" descr="C:/Users/Aitor/Documents/apuntes-profe/entornos-de-desarrollo/docs/tema6/img/casos-uso-icono.png">    </p:cNvPr>
+          <p:cNvPicPr>
+            <a:picLocks noChangeAspect="1"/>
+          </p:cNvPicPr>
+          <p:nvPr/>
+        </p:nvPicPr>
+        <p:blipFill>
+          <a:blip r:embed="rId2"/>
+          <a:stretch>
+            <a:fillRect/>
+          </a:stretch>
+        </p:blipFill>
+        <p:spPr>
+          <a:xfrm>
+            <a:off x="8595360" y="3611880"/>
+            <a:ext cx="1417320" cy="1078992"/>
+          </a:xfrm>
+          <a:prstGeom prst="rect">
+            <a:avLst/>
+          </a:prstGeom>
+        </p:spPr>
+      </p:pic>
+      <p:sp>
+        <p:nvSpPr>
+          <p:cNvPr id="15" name="Text 11"/>
+          <p:cNvSpPr/>
+          <p:nvPr/>
+        </p:nvSpPr>
+        <p:spPr>
+          <a:xfrm>
+            <a:off x="8321040" y="4718304"/>
+            <a:ext cx="1965960" cy="320040"/>
           </a:xfrm>
           <a:prstGeom prst="rect">
             <a:avLst/>
@@ -4152,30 +6148,30 @@
           <a:ln/>
         </p:spPr>
         <p:txBody>
-          <a:bodyPr wrap="square" rtlCol="0" anchor="ctr"/>
-          <a:lstStyle/>
-          <a:p>
-            <a:pPr indent="0" marL="0">
+          <a:bodyPr wrap="square" rtlCol="0" anchor="t"/>
+          <a:lstStyle/>
+          <a:p>
+            <a:pPr algn="ctr" indent="0" marL="0">
               <a:buNone/>
             </a:pPr>
             <a:r>
-              <a:rPr lang="en-US" sz="1400" dirty="0">
+              <a:rPr lang="en-US" sz="1000" i="1" dirty="0">
                 <a:solidFill>
-                  <a:srgbClr val="212121"/>
+                  <a:srgbClr val="757575"/>
                 </a:solidFill>
                 <a:latin typeface="Arial" pitchFamily="34" charset="0"/>
                 <a:ea typeface="Arial" pitchFamily="34" charset="-122"/>
                 <a:cs typeface="Arial" pitchFamily="34" charset="-120"/>
               </a:rPr>
-              <a:t>El diagrama muestra el caso de uso como una sola elipse; los escenarios se detallan en la descripción narrativa que lo acompaña: quién lo inicia, flujo normal, alternativas y qué puede salir mal.</a:t>
-            </a:r>
-            <a:endParaRPr lang="en-US" sz="1400" dirty="0"/>
-          </a:p>
-        </p:txBody>
-      </p:sp>
-      <p:sp>
-        <p:nvSpPr>
-          <p:cNvPr id="12" name="Text 10"/>
+              <a:t>Icono de caso de uso (elipse) en la paleta UML de DIA</a:t>
+            </a:r>
+            <a:endParaRPr lang="en-US" sz="1000" dirty="0"/>
+          </a:p>
+        </p:txBody>
+      </p:sp>
+      <p:sp>
+        <p:nvSpPr>
+          <p:cNvPr id="16" name="Text 12"/>
           <p:cNvSpPr/>
           <p:nvPr/>
         </p:nvSpPr>
@@ -4373,8 +6369,8 @@
         </p:nvSpPr>
         <p:spPr>
           <a:xfrm>
-            <a:off x="548640" y="1600200"/>
-            <a:ext cx="11091672" cy="1280160"/>
+            <a:off x="548640" y="1554480"/>
+            <a:ext cx="6949440" cy="1280160"/>
           </a:xfrm>
           <a:prstGeom prst="rect">
             <a:avLst/>
@@ -4393,7 +6389,7 @@
               <a:buNone/>
             </a:pPr>
             <a:r>
-              <a:rPr lang="en-US" sz="1500" dirty="0">
+              <a:rPr lang="en-US" sz="1400" dirty="0">
                 <a:solidFill>
                   <a:srgbClr val="212121"/>
                 </a:solidFill>
@@ -4403,7 +6399,7 @@
               </a:rPr>
               <a:t>•  La línea recta que une un actor con un caso de uso que puede iniciar. No lleva flecha.</a:t>
             </a:r>
-            <a:endParaRPr lang="en-US" sz="1500" dirty="0"/>
+            <a:endParaRPr lang="en-US" sz="1400" dirty="0"/>
           </a:p>
           <a:p>
             <a:pPr indent="0" marL="0">
@@ -4413,7 +6409,7 @@
               <a:buNone/>
             </a:pPr>
             <a:r>
-              <a:rPr lang="en-US" sz="1500" dirty="0">
+              <a:rPr lang="en-US" sz="1400" dirty="0">
                 <a:solidFill>
                   <a:srgbClr val="212121"/>
                 </a:solidFill>
@@ -4423,7 +6419,7 @@
               </a:rPr>
               <a:t>•  Su nombre oficial es relación (o asociación) de comunicación: el actor "se comunica" con esa funcionalidad.</a:t>
             </a:r>
-            <a:endParaRPr lang="en-US" sz="1500" dirty="0"/>
+            <a:endParaRPr lang="en-US" sz="1400" dirty="0"/>
           </a:p>
         </p:txBody>
       </p:sp>
@@ -4435,7 +6431,7 @@
         </p:nvSpPr>
         <p:spPr>
           <a:xfrm>
-            <a:off x="548640" y="3063240"/>
+            <a:off x="548640" y="2788920"/>
             <a:ext cx="11091672" cy="411480"/>
           </a:xfrm>
           <a:prstGeom prst="rect">
@@ -4460,7 +6456,7 @@
         </p:nvSpPr>
         <p:spPr>
           <a:xfrm>
-            <a:off x="685800" y="3063240"/>
+            <a:off x="685800" y="2788920"/>
             <a:ext cx="10817352" cy="411480"/>
           </a:xfrm>
           <a:prstGeom prst="rect">
@@ -4499,8 +6495,8 @@
         </p:nvSpPr>
         <p:spPr>
           <a:xfrm>
-            <a:off x="548640" y="3611880"/>
-            <a:ext cx="11091672" cy="1280160"/>
+            <a:off x="548640" y="3291840"/>
+            <a:ext cx="6949440" cy="1280160"/>
           </a:xfrm>
           <a:prstGeom prst="rect">
             <a:avLst/>
@@ -4519,7 +6515,7 @@
               <a:buNone/>
             </a:pPr>
             <a:r>
-              <a:rPr lang="en-US" sz="1500" dirty="0">
+              <a:rPr lang="en-US" sz="1400" dirty="0">
                 <a:solidFill>
                   <a:srgbClr val="212121"/>
                 </a:solidFill>
@@ -4529,7 +6525,7 @@
               </a:rPr>
               <a:t>•  Un rectángulo que contiene TODOS los casos de uso: delimita qué forma parte del software.</a:t>
             </a:r>
-            <a:endParaRPr lang="en-US" sz="1500" dirty="0"/>
+            <a:endParaRPr lang="en-US" sz="1400" dirty="0"/>
           </a:p>
           <a:p>
             <a:pPr indent="0" marL="0">
@@ -4539,7 +6535,7 @@
               <a:buNone/>
             </a:pPr>
             <a:r>
-              <a:rPr lang="en-US" sz="1500" dirty="0">
+              <a:rPr lang="en-US" sz="1400" dirty="0">
                 <a:solidFill>
                   <a:srgbClr val="212121"/>
                 </a:solidFill>
@@ -4549,7 +6545,7 @@
               </a:rPr>
               <a:t>•  Los actores quedan siempre fuera: interactúan con el sistema, pero no son parte de lo que se construye.</a:t>
             </a:r>
-            <a:endParaRPr lang="en-US" sz="1500" dirty="0"/>
+            <a:endParaRPr lang="en-US" sz="1400" dirty="0"/>
           </a:p>
         </p:txBody>
       </p:sp>
@@ -4561,8 +6557,93 @@
         </p:nvSpPr>
         <p:spPr>
           <a:xfrm>
-            <a:off x="548640" y="5074920"/>
-            <a:ext cx="11091672" cy="777240"/>
+            <a:off x="7772400" y="1600200"/>
+            <a:ext cx="2926080" cy="2212848"/>
+          </a:xfrm>
+          <a:prstGeom prst="rect">
+            <a:avLst/>
+          </a:prstGeom>
+          <a:ln w="12700">
+            <a:solidFill>
+              <a:srgbClr val="EEEEEE"/>
+            </a:solidFill>
+            <a:prstDash val="solid"/>
+          </a:ln>
+        </p:spPr>
+      </p:sp>
+      <p:pic>
+        <p:nvPicPr>
+          <p:cNvPr id="11" name="Image 0" descr="C:/Users/Aitor/Documents/apuntes-profe/entornos-de-desarrollo/docs/tema6/img/casos-sistema-ejemplo.png">    </p:cNvPr>
+          <p:cNvPicPr>
+            <a:picLocks noChangeAspect="1"/>
+          </p:cNvPicPr>
+          <p:nvPr/>
+        </p:nvPicPr>
+        <p:blipFill>
+          <a:blip r:embed="rId1"/>
+          <a:stretch>
+            <a:fillRect/>
+          </a:stretch>
+        </p:blipFill>
+        <p:spPr>
+          <a:xfrm>
+            <a:off x="7772400" y="1600200"/>
+            <a:ext cx="2926080" cy="2212848"/>
+          </a:xfrm>
+          <a:prstGeom prst="rect">
+            <a:avLst/>
+          </a:prstGeom>
+        </p:spPr>
+      </p:pic>
+      <p:sp>
+        <p:nvSpPr>
+          <p:cNvPr id="12" name="Text 9"/>
+          <p:cNvSpPr/>
+          <p:nvPr/>
+        </p:nvSpPr>
+        <p:spPr>
+          <a:xfrm>
+            <a:off x="7498080" y="3840480"/>
+            <a:ext cx="3474720" cy="320040"/>
+          </a:xfrm>
+          <a:prstGeom prst="rect">
+            <a:avLst/>
+          </a:prstGeom>
+          <a:noFill/>
+          <a:ln/>
+        </p:spPr>
+        <p:txBody>
+          <a:bodyPr wrap="square" rtlCol="0" anchor="t"/>
+          <a:lstStyle/>
+          <a:p>
+            <a:pPr algn="ctr" indent="0" marL="0">
+              <a:buNone/>
+            </a:pPr>
+            <a:r>
+              <a:rPr lang="en-US" sz="1000" i="1" dirty="0">
+                <a:solidFill>
+                  <a:srgbClr val="757575"/>
+                </a:solidFill>
+                <a:latin typeface="Arial" pitchFamily="34" charset="0"/>
+                <a:ea typeface="Arial" pitchFamily="34" charset="-122"/>
+                <a:cs typeface="Arial" pitchFamily="34" charset="-120"/>
+              </a:rPr>
+              <a:t>Límite de sistema en DIA con un actor y un caso de uso</a:t>
+            </a:r>
+            <a:endParaRPr lang="en-US" sz="1000" dirty="0"/>
+          </a:p>
+        </p:txBody>
+      </p:sp>
+      <p:sp>
+        <p:nvSpPr>
+          <p:cNvPr id="13" name="Shape 10"/>
+          <p:cNvSpPr/>
+          <p:nvPr/>
+        </p:nvSpPr>
+        <p:spPr>
+          <a:xfrm>
+            <a:off x="548640" y="4800600"/>
+            <a:ext cx="11091672" cy="731520"/>
           </a:xfrm>
           <a:prstGeom prst="roundRect">
             <a:avLst/>
@@ -4580,14 +6661,14 @@
       </p:sp>
       <p:sp>
         <p:nvSpPr>
-          <p:cNvPr id="11" name="Text 9"/>
-          <p:cNvSpPr/>
-          <p:nvPr/>
-        </p:nvSpPr>
-        <p:spPr>
-          <a:xfrm>
-            <a:off x="777240" y="5148072"/>
-            <a:ext cx="10634472" cy="630936"/>
+          <p:cNvPr id="14" name="Text 11"/>
+          <p:cNvSpPr/>
+          <p:nvPr/>
+        </p:nvSpPr>
+        <p:spPr>
+          <a:xfrm>
+            <a:off x="777240" y="4873752"/>
+            <a:ext cx="10634472" cy="585216"/>
           </a:xfrm>
           <a:prstGeom prst="rect">
             <a:avLst/>
@@ -4619,7 +6700,7 @@
       </p:sp>
       <p:sp>
         <p:nvSpPr>
-          <p:cNvPr id="12" name="Text 10"/>
+          <p:cNvPr id="15" name="Text 12"/>
           <p:cNvSpPr/>
           <p:nvPr/>
         </p:nvSpPr>
@@ -4739,6 +6820,368 @@
                 <a:ea typeface="Arial" pitchFamily="34" charset="-122"/>
                 <a:cs typeface="Arial" pitchFamily="34" charset="-120"/>
               </a:rPr>
+              <a:t>Ejemplo completo</a:t>
+            </a:r>
+            <a:endParaRPr lang="en-US" sz="2300" dirty="0"/>
+          </a:p>
+        </p:txBody>
+      </p:sp>
+      <p:sp>
+        <p:nvSpPr>
+          <p:cNvPr id="4" name="Shape 2"/>
+          <p:cNvSpPr/>
+          <p:nvPr/>
+        </p:nvSpPr>
+        <p:spPr>
+          <a:xfrm>
+            <a:off x="822960" y="1097280"/>
+            <a:ext cx="5120640" cy="3154680"/>
+          </a:xfrm>
+          <a:prstGeom prst="rect">
+            <a:avLst/>
+          </a:prstGeom>
+          <a:ln w="12700">
+            <a:solidFill>
+              <a:srgbClr val="EEEEEE"/>
+            </a:solidFill>
+            <a:prstDash val="solid"/>
+          </a:ln>
+        </p:spPr>
+      </p:sp>
+      <p:pic>
+        <p:nvPicPr>
+          <p:cNvPr id="5" name="Image 0" descr="C:/Users/Aitor/Documents/apuntes-profe/entornos-de-desarrollo/docs/tema6/img/casos-restaurante-ejemplo.png">    </p:cNvPr>
+          <p:cNvPicPr>
+            <a:picLocks noChangeAspect="1"/>
+          </p:cNvPicPr>
+          <p:nvPr/>
+        </p:nvPicPr>
+        <p:blipFill>
+          <a:blip r:embed="rId1"/>
+          <a:stretch>
+            <a:fillRect/>
+          </a:stretch>
+        </p:blipFill>
+        <p:spPr>
+          <a:xfrm>
+            <a:off x="822960" y="1097280"/>
+            <a:ext cx="5120640" cy="3154680"/>
+          </a:xfrm>
+          <a:prstGeom prst="rect">
+            <a:avLst/>
+          </a:prstGeom>
+        </p:spPr>
+      </p:pic>
+      <p:sp>
+        <p:nvSpPr>
+          <p:cNvPr id="6" name="Text 3"/>
+          <p:cNvSpPr/>
+          <p:nvPr/>
+        </p:nvSpPr>
+        <p:spPr>
+          <a:xfrm>
+            <a:off x="548640" y="4279392"/>
+            <a:ext cx="5669280" cy="320040"/>
+          </a:xfrm>
+          <a:prstGeom prst="rect">
+            <a:avLst/>
+          </a:prstGeom>
+          <a:noFill/>
+          <a:ln/>
+        </p:spPr>
+        <p:txBody>
+          <a:bodyPr wrap="square" rtlCol="0" anchor="t"/>
+          <a:lstStyle/>
+          <a:p>
+            <a:pPr algn="ctr" indent="0" marL="0">
+              <a:buNone/>
+            </a:pPr>
+            <a:r>
+              <a:rPr lang="en-US" sz="1100" i="1" dirty="0">
+                <a:solidFill>
+                  <a:srgbClr val="757575"/>
+                </a:solidFill>
+                <a:latin typeface="Arial" pitchFamily="34" charset="0"/>
+                <a:ea typeface="Arial" pitchFamily="34" charset="-122"/>
+                <a:cs typeface="Arial" pitchFamily="34" charset="-120"/>
+              </a:rPr>
+              <a:t>Casos de uso de un restaurante. "Entregar comida" queda fuera: la realiza el restaurante, no el software.</a:t>
+            </a:r>
+            <a:endParaRPr lang="en-US" sz="1100" dirty="0"/>
+          </a:p>
+        </p:txBody>
+      </p:sp>
+      <p:sp>
+        <p:nvSpPr>
+          <p:cNvPr id="7" name="Shape 4"/>
+          <p:cNvSpPr/>
+          <p:nvPr/>
+        </p:nvSpPr>
+        <p:spPr>
+          <a:xfrm>
+            <a:off x="7040880" y="1097280"/>
+            <a:ext cx="3154680" cy="3154680"/>
+          </a:xfrm>
+          <a:prstGeom prst="rect">
+            <a:avLst/>
+          </a:prstGeom>
+          <a:ln w="12700">
+            <a:solidFill>
+              <a:srgbClr val="EEEEEE"/>
+            </a:solidFill>
+            <a:prstDash val="solid"/>
+          </a:ln>
+        </p:spPr>
+      </p:sp>
+      <p:pic>
+        <p:nvPicPr>
+          <p:cNvPr id="8" name="Image 1" descr="C:/Users/Aitor/Documents/apuntes-profe/entornos-de-desarrollo/docs/tema6/img/casos-generalizacion-actor.png">    </p:cNvPr>
+          <p:cNvPicPr>
+            <a:picLocks noChangeAspect="1"/>
+          </p:cNvPicPr>
+          <p:nvPr/>
+        </p:nvPicPr>
+        <p:blipFill>
+          <a:blip r:embed="rId2"/>
+          <a:stretch>
+            <a:fillRect/>
+          </a:stretch>
+        </p:blipFill>
+        <p:spPr>
+          <a:xfrm>
+            <a:off x="7040880" y="1097280"/>
+            <a:ext cx="3154680" cy="3154680"/>
+          </a:xfrm>
+          <a:prstGeom prst="rect">
+            <a:avLst/>
+          </a:prstGeom>
+        </p:spPr>
+      </p:pic>
+      <p:sp>
+        <p:nvSpPr>
+          <p:cNvPr id="9" name="Text 5"/>
+          <p:cNvSpPr/>
+          <p:nvPr/>
+        </p:nvSpPr>
+        <p:spPr>
+          <a:xfrm>
+            <a:off x="6766560" y="4279392"/>
+            <a:ext cx="3703320" cy="320040"/>
+          </a:xfrm>
+          <a:prstGeom prst="rect">
+            <a:avLst/>
+          </a:prstGeom>
+          <a:noFill/>
+          <a:ln/>
+        </p:spPr>
+        <p:txBody>
+          <a:bodyPr wrap="square" rtlCol="0" anchor="t"/>
+          <a:lstStyle/>
+          <a:p>
+            <a:pPr algn="ctr" indent="0" marL="0">
+              <a:buNone/>
+            </a:pPr>
+            <a:r>
+              <a:rPr lang="en-US" sz="1100" i="1" dirty="0">
+                <a:solidFill>
+                  <a:srgbClr val="757575"/>
+                </a:solidFill>
+                <a:latin typeface="Arial" pitchFamily="34" charset="0"/>
+                <a:ea typeface="Arial" pitchFamily="34" charset="-122"/>
+                <a:cs typeface="Arial" pitchFamily="34" charset="-120"/>
+              </a:rPr>
+              <a:t>Generalización de actores: Administrador hereda los casos de Usuario y añade los suyos.</a:t>
+            </a:r>
+            <a:endParaRPr lang="en-US" sz="1100" dirty="0"/>
+          </a:p>
+        </p:txBody>
+      </p:sp>
+      <p:sp>
+        <p:nvSpPr>
+          <p:cNvPr id="10" name="Shape 6"/>
+          <p:cNvSpPr/>
+          <p:nvPr/>
+        </p:nvSpPr>
+        <p:spPr>
+          <a:xfrm>
+            <a:off x="548640" y="4892040"/>
+            <a:ext cx="11091672" cy="1051560"/>
+          </a:xfrm>
+          <a:prstGeom prst="roundRect">
+            <a:avLst/>
+          </a:prstGeom>
+          <a:solidFill>
+            <a:srgbClr val="E0F2F1"/>
+          </a:solidFill>
+          <a:ln w="19050">
+            <a:solidFill>
+              <a:srgbClr val="009688"/>
+            </a:solidFill>
+            <a:prstDash val="solid"/>
+          </a:ln>
+        </p:spPr>
+      </p:sp>
+      <p:sp>
+        <p:nvSpPr>
+          <p:cNvPr id="11" name="Text 7"/>
+          <p:cNvSpPr/>
+          <p:nvPr/>
+        </p:nvSpPr>
+        <p:spPr>
+          <a:xfrm>
+            <a:off x="777240" y="4965192"/>
+            <a:ext cx="10634472" cy="905256"/>
+          </a:xfrm>
+          <a:prstGeom prst="rect">
+            <a:avLst/>
+          </a:prstGeom>
+          <a:noFill/>
+          <a:ln/>
+        </p:spPr>
+        <p:txBody>
+          <a:bodyPr wrap="square" rtlCol="0" anchor="ctr"/>
+          <a:lstStyle/>
+          <a:p>
+            <a:pPr indent="0" marL="0">
+              <a:buNone/>
+            </a:pPr>
+            <a:r>
+              <a:rPr lang="en-US" sz="1500" dirty="0">
+                <a:solidFill>
+                  <a:srgbClr val="212121"/>
+                </a:solidFill>
+                <a:latin typeface="Arial" pitchFamily="34" charset="0"/>
+                <a:ea typeface="Arial" pitchFamily="34" charset="-122"/>
+                <a:cs typeface="Arial" pitchFamily="34" charset="-120"/>
+              </a:rPr>
+              <a:t>Fíjate en las dos ideas clave: lo que hace el propio restaurante queda FUERA del sistema, y un actor puede heredar de otro para no repetir relaciones.</a:t>
+            </a:r>
+            <a:endParaRPr lang="en-US" sz="1500" dirty="0"/>
+          </a:p>
+        </p:txBody>
+      </p:sp>
+      <p:sp>
+        <p:nvSpPr>
+          <p:cNvPr id="12" name="Text 8"/>
+          <p:cNvSpPr/>
+          <p:nvPr/>
+        </p:nvSpPr>
+        <p:spPr>
+          <a:xfrm>
+            <a:off x="548640" y="6473952"/>
+            <a:ext cx="11091672" cy="292608"/>
+          </a:xfrm>
+          <a:prstGeom prst="rect">
+            <a:avLst/>
+          </a:prstGeom>
+          <a:noFill/>
+          <a:ln/>
+        </p:spPr>
+        <p:txBody>
+          <a:bodyPr wrap="square" rtlCol="0" anchor="ctr"/>
+          <a:lstStyle/>
+          <a:p>
+            <a:pPr algn="r" indent="0" marL="0">
+              <a:buNone/>
+            </a:pPr>
+            <a:r>
+              <a:rPr lang="en-US" sz="1100" dirty="0">
+                <a:solidFill>
+                  <a:srgbClr val="757575"/>
+                </a:solidFill>
+                <a:latin typeface="Arial" pitchFamily="34" charset="0"/>
+                <a:ea typeface="Arial" pitchFamily="34" charset="-122"/>
+                <a:cs typeface="Arial" pitchFamily="34" charset="-120"/>
+              </a:rPr>
+              <a:t>Entornos de Desarrollo — Tema 6 · Diagrama de casos de uso</a:t>
+            </a:r>
+            <a:endParaRPr lang="en-US" sz="1100" dirty="0"/>
+          </a:p>
+        </p:txBody>
+      </p:sp>
+    </p:spTree>
+  </p:cSld>
+  <p:clrMapOvr>
+    <a:masterClrMapping/>
+  </p:clrMapOvr>
+</p:sld>
+</file>
+
+<file path=ppt/slides/slide6.xml><?xml version="1.0" encoding="utf-8"?>
+<p:sld xmlns:a="http://schemas.openxmlformats.org/drawingml/2006/main" xmlns:r="http://schemas.openxmlformats.org/officeDocument/2006/relationships" xmlns:p="http://schemas.openxmlformats.org/presentationml/2006/main">
+  <p:cSld name="Slide 6">
+    <p:spTree>
+      <p:nvGrpSpPr>
+        <p:cNvPr id="1" name=""/>
+        <p:cNvGrpSpPr/>
+        <p:nvPr/>
+      </p:nvGrpSpPr>
+      <p:grpSpPr>
+        <a:xfrm>
+          <a:off x="0" y="0"/>
+          <a:ext cx="0" cy="0"/>
+          <a:chOff x="0" y="0"/>
+          <a:chExt cx="0" cy="0"/>
+        </a:xfrm>
+      </p:grpSpPr>
+      <p:sp>
+        <p:nvSpPr>
+          <p:cNvPr id="2" name="Shape 0"/>
+          <p:cNvSpPr/>
+          <p:nvPr/>
+        </p:nvSpPr>
+        <p:spPr>
+          <a:xfrm>
+            <a:off x="0" y="0"/>
+            <a:ext cx="12188952" cy="777240"/>
+          </a:xfrm>
+          <a:prstGeom prst="rect">
+            <a:avLst/>
+          </a:prstGeom>
+          <a:solidFill>
+            <a:srgbClr val="303F9F"/>
+          </a:solidFill>
+          <a:ln w="12700">
+            <a:solidFill>
+              <a:srgbClr val="303F9F"/>
+            </a:solidFill>
+            <a:prstDash val="solid"/>
+          </a:ln>
+        </p:spPr>
+      </p:sp>
+      <p:sp>
+        <p:nvSpPr>
+          <p:cNvPr id="3" name="Text 1"/>
+          <p:cNvSpPr/>
+          <p:nvPr/>
+        </p:nvSpPr>
+        <p:spPr>
+          <a:xfrm>
+            <a:off x="365760" y="0"/>
+            <a:ext cx="11457432" cy="777240"/>
+          </a:xfrm>
+          <a:prstGeom prst="rect">
+            <a:avLst/>
+          </a:prstGeom>
+          <a:noFill/>
+          <a:ln/>
+        </p:spPr>
+        <p:txBody>
+          <a:bodyPr wrap="square" rtlCol="0" anchor="ctr"/>
+          <a:lstStyle/>
+          <a:p>
+            <a:pPr indent="0" marL="0">
+              <a:buNone/>
+            </a:pPr>
+            <a:r>
+              <a:rPr lang="en-US" sz="2300" b="1" dirty="0">
+                <a:solidFill>
+                  <a:srgbClr val="FFFFFF"/>
+                </a:solidFill>
+                <a:latin typeface="Arial" pitchFamily="34" charset="0"/>
+                <a:ea typeface="Arial" pitchFamily="34" charset="-122"/>
+                <a:cs typeface="Arial" pitchFamily="34" charset="-120"/>
+              </a:rPr>
               <a:t>De la descripción al diagrama</a:t>
             </a:r>
             <a:endParaRPr lang="en-US" sz="2300" dirty="0"/>
@@ -4747,7 +7190,7 @@
       </p:sp>
       <p:graphicFrame>
         <p:nvGraphicFramePr>
-          <p:cNvPr id="6" name="Table 0"/>
+          <p:cNvPr id="7" name="Table 0"/>
           <p:cNvGraphicFramePr>
             <a:graphicFrameLocks noGrp="1"/>
           </p:cNvGraphicFramePr>
@@ -5473,7 +7916,7 @@
         </p:nvSpPr>
         <p:spPr>
           <a:xfrm>
-            <a:off x="548640" y="4572000"/>
+            <a:off x="548640" y="4983480"/>
             <a:ext cx="11091672" cy="1051560"/>
           </a:xfrm>
           <a:prstGeom prst="roundRect">
@@ -5498,7 +7941,7 @@
         </p:nvSpPr>
         <p:spPr>
           <a:xfrm>
-            <a:off x="777240" y="4645152"/>
+            <a:off x="777240" y="5056632"/>
             <a:ext cx="10634472" cy="905256"/>
           </a:xfrm>
           <a:prstGeom prst="rect">
@@ -5532,471 +7975,6 @@
       <p:sp>
         <p:nvSpPr>
           <p:cNvPr id="7" name="Text 4"/>
-          <p:cNvSpPr/>
-          <p:nvPr/>
-        </p:nvSpPr>
-        <p:spPr>
-          <a:xfrm>
-            <a:off x="548640" y="6473952"/>
-            <a:ext cx="11091672" cy="292608"/>
-          </a:xfrm>
-          <a:prstGeom prst="rect">
-            <a:avLst/>
-          </a:prstGeom>
-          <a:noFill/>
-          <a:ln/>
-        </p:spPr>
-        <p:txBody>
-          <a:bodyPr wrap="square" rtlCol="0" anchor="ctr"/>
-          <a:lstStyle/>
-          <a:p>
-            <a:pPr algn="r" indent="0" marL="0">
-              <a:buNone/>
-            </a:pPr>
-            <a:r>
-              <a:rPr lang="en-US" sz="1100" dirty="0">
-                <a:solidFill>
-                  <a:srgbClr val="757575"/>
-                </a:solidFill>
-                <a:latin typeface="Arial" pitchFamily="34" charset="0"/>
-                <a:ea typeface="Arial" pitchFamily="34" charset="-122"/>
-                <a:cs typeface="Arial" pitchFamily="34" charset="-120"/>
-              </a:rPr>
-              <a:t>Entornos de Desarrollo — Tema 6 · Diagrama de casos de uso</a:t>
-            </a:r>
-            <a:endParaRPr lang="en-US" sz="1100" dirty="0"/>
-          </a:p>
-        </p:txBody>
-      </p:sp>
-    </p:spTree>
-  </p:cSld>
-  <p:clrMapOvr>
-    <a:masterClrMapping/>
-  </p:clrMapOvr>
-</p:sld>
-</file>
-
-<file path=ppt/slides/slide6.xml><?xml version="1.0" encoding="utf-8"?>
-<p:sld xmlns:a="http://schemas.openxmlformats.org/drawingml/2006/main" xmlns:r="http://schemas.openxmlformats.org/officeDocument/2006/relationships" xmlns:p="http://schemas.openxmlformats.org/presentationml/2006/main">
-  <p:cSld name="Slide 6">
-    <p:spTree>
-      <p:nvGrpSpPr>
-        <p:cNvPr id="1" name=""/>
-        <p:cNvGrpSpPr/>
-        <p:nvPr/>
-      </p:nvGrpSpPr>
-      <p:grpSpPr>
-        <a:xfrm>
-          <a:off x="0" y="0"/>
-          <a:ext cx="0" cy="0"/>
-          <a:chOff x="0" y="0"/>
-          <a:chExt cx="0" cy="0"/>
-        </a:xfrm>
-      </p:grpSpPr>
-      <p:sp>
-        <p:nvSpPr>
-          <p:cNvPr id="2" name="Shape 0"/>
-          <p:cNvSpPr/>
-          <p:nvPr/>
-        </p:nvSpPr>
-        <p:spPr>
-          <a:xfrm>
-            <a:off x="0" y="0"/>
-            <a:ext cx="12188952" cy="777240"/>
-          </a:xfrm>
-          <a:prstGeom prst="rect">
-            <a:avLst/>
-          </a:prstGeom>
-          <a:solidFill>
-            <a:srgbClr val="303F9F"/>
-          </a:solidFill>
-          <a:ln w="12700">
-            <a:solidFill>
-              <a:srgbClr val="303F9F"/>
-            </a:solidFill>
-            <a:prstDash val="solid"/>
-          </a:ln>
-        </p:spPr>
-      </p:sp>
-      <p:sp>
-        <p:nvSpPr>
-          <p:cNvPr id="3" name="Text 1"/>
-          <p:cNvSpPr/>
-          <p:nvPr/>
-        </p:nvSpPr>
-        <p:spPr>
-          <a:xfrm>
-            <a:off x="365760" y="0"/>
-            <a:ext cx="11457432" cy="777240"/>
-          </a:xfrm>
-          <a:prstGeom prst="rect">
-            <a:avLst/>
-          </a:prstGeom>
-          <a:noFill/>
-          <a:ln/>
-        </p:spPr>
-        <p:txBody>
-          <a:bodyPr wrap="square" rtlCol="0" anchor="ctr"/>
-          <a:lstStyle/>
-          <a:p>
-            <a:pPr indent="0" marL="0">
-              <a:buNone/>
-            </a:pPr>
-            <a:r>
-              <a:rPr lang="en-US" sz="2300" b="1" dirty="0">
-                <a:solidFill>
-                  <a:srgbClr val="FFFFFF"/>
-                </a:solidFill>
-                <a:latin typeface="Arial" pitchFamily="34" charset="0"/>
-                <a:ea typeface="Arial" pitchFamily="34" charset="-122"/>
-                <a:cs typeface="Arial" pitchFamily="34" charset="-120"/>
-              </a:rPr>
-              <a:t>Relaciones avanzadas: inclusión («include»)</a:t>
-            </a:r>
-            <a:endParaRPr lang="en-US" sz="2300" dirty="0"/>
-          </a:p>
-        </p:txBody>
-      </p:sp>
-      <p:sp>
-        <p:nvSpPr>
-          <p:cNvPr id="4" name="Text 2"/>
-          <p:cNvSpPr/>
-          <p:nvPr/>
-        </p:nvSpPr>
-        <p:spPr>
-          <a:xfrm>
-            <a:off x="548640" y="1097280"/>
-            <a:ext cx="11091672" cy="1737360"/>
-          </a:xfrm>
-          <a:prstGeom prst="rect">
-            <a:avLst/>
-          </a:prstGeom>
-          <a:noFill/>
-          <a:ln/>
-        </p:spPr>
-        <p:txBody>
-          <a:bodyPr wrap="square" rtlCol="0" anchor="t"/>
-          <a:lstStyle/>
-          <a:p>
-            <a:pPr indent="0" marL="0">
-              <a:spcAft>
-                <a:spcPts val="800"/>
-              </a:spcAft>
-              <a:buNone/>
-            </a:pPr>
-            <a:r>
-              <a:rPr lang="en-US" sz="1600" dirty="0">
-                <a:solidFill>
-                  <a:srgbClr val="212121"/>
-                </a:solidFill>
-                <a:latin typeface="Arial" pitchFamily="34" charset="0"/>
-                <a:ea typeface="Arial" pitchFamily="34" charset="-122"/>
-                <a:cs typeface="Arial" pitchFamily="34" charset="-120"/>
-              </a:rPr>
-              <a:t>•  Un caso de uso SIEMPRE necesita ejecutar otro.</a:t>
-            </a:r>
-            <a:endParaRPr lang="en-US" sz="1600" dirty="0"/>
-          </a:p>
-          <a:p>
-            <a:pPr indent="0" marL="0">
-              <a:spcAft>
-                <a:spcPts val="800"/>
-              </a:spcAft>
-              <a:buNone/>
-            </a:pPr>
-            <a:r>
-              <a:rPr lang="en-US" sz="1600" dirty="0">
-                <a:solidFill>
-                  <a:srgbClr val="212121"/>
-                </a:solidFill>
-                <a:latin typeface="Arial" pitchFamily="34" charset="0"/>
-                <a:ea typeface="Arial" pitchFamily="34" charset="-122"/>
-                <a:cs typeface="Arial" pitchFamily="34" charset="-120"/>
-              </a:rPr>
-              <a:t>•  Se usa cuando un comportamiento se repite en varios casos de uso y quieres evitar duplicarlo.</a:t>
-            </a:r>
-            <a:endParaRPr lang="en-US" sz="1600" dirty="0"/>
-          </a:p>
-          <a:p>
-            <a:pPr indent="0" marL="0">
-              <a:spcAft>
-                <a:spcPts val="800"/>
-              </a:spcAft>
-              <a:buNone/>
-            </a:pPr>
-            <a:r>
-              <a:rPr lang="en-US" sz="1600" dirty="0">
-                <a:solidFill>
-                  <a:srgbClr val="212121"/>
-                </a:solidFill>
-                <a:latin typeface="Arial" pitchFamily="34" charset="0"/>
-                <a:ea typeface="Arial" pitchFamily="34" charset="-122"/>
-                <a:cs typeface="Arial" pitchFamily="34" charset="-120"/>
-              </a:rPr>
-              <a:t>•  Se dibuja con línea discontinua y flecha apuntando al caso INCLUIDO, etiquetada «include».</a:t>
-            </a:r>
-            <a:endParaRPr lang="en-US" sz="1600" dirty="0"/>
-          </a:p>
-        </p:txBody>
-      </p:sp>
-      <p:sp>
-        <p:nvSpPr>
-          <p:cNvPr id="5" name="Shape 3"/>
-          <p:cNvSpPr/>
-          <p:nvPr/>
-        </p:nvSpPr>
-        <p:spPr>
-          <a:xfrm>
-            <a:off x="1463040" y="3383280"/>
-            <a:ext cx="2468880" cy="777240"/>
-          </a:xfrm>
-          <a:prstGeom prst="ellipse">
-            <a:avLst/>
-          </a:prstGeom>
-          <a:solidFill>
-            <a:srgbClr val="E8EAF6"/>
-          </a:solidFill>
-          <a:ln w="19050">
-            <a:solidFill>
-              <a:srgbClr val="3F51B5"/>
-            </a:solidFill>
-            <a:prstDash val="solid"/>
-          </a:ln>
-        </p:spPr>
-      </p:sp>
-      <p:sp>
-        <p:nvSpPr>
-          <p:cNvPr id="6" name="Text 4"/>
-          <p:cNvSpPr/>
-          <p:nvPr/>
-        </p:nvSpPr>
-        <p:spPr>
-          <a:xfrm>
-            <a:off x="1463040" y="3383280"/>
-            <a:ext cx="2468880" cy="777240"/>
-          </a:xfrm>
-          <a:prstGeom prst="rect">
-            <a:avLst/>
-          </a:prstGeom>
-          <a:noFill/>
-          <a:ln/>
-        </p:spPr>
-        <p:txBody>
-          <a:bodyPr wrap="square" rtlCol="0" anchor="ctr"/>
-          <a:lstStyle/>
-          <a:p>
-            <a:pPr algn="ctr" indent="0" marL="0">
-              <a:buNone/>
-            </a:pPr>
-            <a:r>
-              <a:rPr lang="en-US" sz="1400" dirty="0">
-                <a:solidFill>
-                  <a:srgbClr val="212121"/>
-                </a:solidFill>
-                <a:latin typeface="Arial" pitchFamily="34" charset="0"/>
-                <a:ea typeface="Arial" pitchFamily="34" charset="-122"/>
-                <a:cs typeface="Arial" pitchFamily="34" charset="-120"/>
-              </a:rPr>
-              <a:t>Realizar pedido</a:t>
-            </a:r>
-            <a:endParaRPr lang="en-US" sz="1400" dirty="0"/>
-          </a:p>
-        </p:txBody>
-      </p:sp>
-      <p:sp>
-        <p:nvSpPr>
-          <p:cNvPr id="7" name="Shape 5"/>
-          <p:cNvSpPr/>
-          <p:nvPr/>
-        </p:nvSpPr>
-        <p:spPr>
-          <a:xfrm>
-            <a:off x="7863840" y="3383280"/>
-            <a:ext cx="2468880" cy="777240"/>
-          </a:xfrm>
-          <a:prstGeom prst="ellipse">
-            <a:avLst/>
-          </a:prstGeom>
-          <a:solidFill>
-            <a:srgbClr val="E8EAF6"/>
-          </a:solidFill>
-          <a:ln w="19050">
-            <a:solidFill>
-              <a:srgbClr val="3F51B5"/>
-            </a:solidFill>
-            <a:prstDash val="solid"/>
-          </a:ln>
-        </p:spPr>
-      </p:sp>
-      <p:sp>
-        <p:nvSpPr>
-          <p:cNvPr id="8" name="Text 6"/>
-          <p:cNvSpPr/>
-          <p:nvPr/>
-        </p:nvSpPr>
-        <p:spPr>
-          <a:xfrm>
-            <a:off x="7863840" y="3383280"/>
-            <a:ext cx="2468880" cy="777240"/>
-          </a:xfrm>
-          <a:prstGeom prst="rect">
-            <a:avLst/>
-          </a:prstGeom>
-          <a:noFill/>
-          <a:ln/>
-        </p:spPr>
-        <p:txBody>
-          <a:bodyPr wrap="square" rtlCol="0" anchor="ctr"/>
-          <a:lstStyle/>
-          <a:p>
-            <a:pPr algn="ctr" indent="0" marL="0">
-              <a:buNone/>
-            </a:pPr>
-            <a:r>
-              <a:rPr lang="en-US" sz="1400" dirty="0">
-                <a:solidFill>
-                  <a:srgbClr val="212121"/>
-                </a:solidFill>
-                <a:latin typeface="Arial" pitchFamily="34" charset="0"/>
-                <a:ea typeface="Arial" pitchFamily="34" charset="-122"/>
-                <a:cs typeface="Arial" pitchFamily="34" charset="-120"/>
-              </a:rPr>
-              <a:t>Iniciar sesión</a:t>
-            </a:r>
-            <a:endParaRPr lang="en-US" sz="1400" dirty="0"/>
-          </a:p>
-        </p:txBody>
-      </p:sp>
-      <p:sp>
-        <p:nvSpPr>
-          <p:cNvPr id="9" name="Shape 7"/>
-          <p:cNvSpPr/>
-          <p:nvPr/>
-        </p:nvSpPr>
-        <p:spPr>
-          <a:xfrm>
-            <a:off x="3931920" y="3767328"/>
-            <a:ext cx="3931920" cy="0"/>
-          </a:xfrm>
-          <a:prstGeom prst="line">
-            <a:avLst/>
-          </a:prstGeom>
-          <a:noFill/>
-          <a:ln w="19050">
-            <a:solidFill>
-              <a:srgbClr val="212121"/>
-            </a:solidFill>
-            <a:prstDash val="dash"/>
-            <a:tailEnd type="triangle"/>
-          </a:ln>
-        </p:spPr>
-      </p:sp>
-      <p:sp>
-        <p:nvSpPr>
-          <p:cNvPr id="10" name="Text 8"/>
-          <p:cNvSpPr/>
-          <p:nvPr/>
-        </p:nvSpPr>
-        <p:spPr>
-          <a:xfrm>
-            <a:off x="4983480" y="3429000"/>
-            <a:ext cx="1828800" cy="274320"/>
-          </a:xfrm>
-          <a:prstGeom prst="rect">
-            <a:avLst/>
-          </a:prstGeom>
-          <a:noFill/>
-          <a:ln/>
-        </p:spPr>
-        <p:txBody>
-          <a:bodyPr wrap="square" rtlCol="0" anchor="ctr"/>
-          <a:lstStyle/>
-          <a:p>
-            <a:pPr algn="ctr" indent="0" marL="0">
-              <a:buNone/>
-            </a:pPr>
-            <a:r>
-              <a:rPr lang="en-US" sz="1100" i="1" dirty="0">
-                <a:solidFill>
-                  <a:srgbClr val="757575"/>
-                </a:solidFill>
-                <a:latin typeface="Arial" pitchFamily="34" charset="0"/>
-                <a:ea typeface="Arial" pitchFamily="34" charset="-122"/>
-                <a:cs typeface="Arial" pitchFamily="34" charset="-120"/>
-              </a:rPr>
-              <a:t>«include»</a:t>
-            </a:r>
-            <a:endParaRPr lang="en-US" sz="1100" dirty="0"/>
-          </a:p>
-        </p:txBody>
-      </p:sp>
-      <p:sp>
-        <p:nvSpPr>
-          <p:cNvPr id="11" name="Shape 9"/>
-          <p:cNvSpPr/>
-          <p:nvPr/>
-        </p:nvSpPr>
-        <p:spPr>
-          <a:xfrm>
-            <a:off x="548640" y="4846320"/>
-            <a:ext cx="11091672" cy="914400"/>
-          </a:xfrm>
-          <a:prstGeom prst="roundRect">
-            <a:avLst/>
-          </a:prstGeom>
-          <a:solidFill>
-            <a:srgbClr val="E0F2F1"/>
-          </a:solidFill>
-          <a:ln w="19050">
-            <a:solidFill>
-              <a:srgbClr val="009688"/>
-            </a:solidFill>
-            <a:prstDash val="solid"/>
-          </a:ln>
-        </p:spPr>
-      </p:sp>
-      <p:sp>
-        <p:nvSpPr>
-          <p:cNvPr id="12" name="Text 10"/>
-          <p:cNvSpPr/>
-          <p:nvPr/>
-        </p:nvSpPr>
-        <p:spPr>
-          <a:xfrm>
-            <a:off x="777240" y="4919472"/>
-            <a:ext cx="10634472" cy="768096"/>
-          </a:xfrm>
-          <a:prstGeom prst="rect">
-            <a:avLst/>
-          </a:prstGeom>
-          <a:noFill/>
-          <a:ln/>
-        </p:spPr>
-        <p:txBody>
-          <a:bodyPr wrap="square" rtlCol="0" anchor="ctr"/>
-          <a:lstStyle/>
-          <a:p>
-            <a:pPr indent="0" marL="0">
-              <a:buNone/>
-            </a:pPr>
-            <a:r>
-              <a:rPr lang="en-US" sz="1500" dirty="0">
-                <a:solidFill>
-                  <a:srgbClr val="212121"/>
-                </a:solidFill>
-                <a:latin typeface="Arial" pitchFamily="34" charset="0"/>
-                <a:ea typeface="Arial" pitchFamily="34" charset="-122"/>
-                <a:cs typeface="Arial" pitchFamily="34" charset="-120"/>
-              </a:rPr>
-              <a:t>Ejemplo: "Realizar pedido" y "Consultar historial" incluyen "Iniciar sesión", porque ambos requieren que el usuario esté autenticado — siempre, sin condición.</a:t>
-            </a:r>
-            <a:endParaRPr lang="en-US" sz="1500" dirty="0"/>
-          </a:p>
-        </p:txBody>
-      </p:sp>
-      <p:sp>
-        <p:nvSpPr>
-          <p:cNvPr id="13" name="Text 11"/>
           <p:cNvSpPr/>
           <p:nvPr/>
         </p:nvSpPr>
@@ -6116,7 +8094,7 @@
                 <a:ea typeface="Arial" pitchFamily="34" charset="-122"/>
                 <a:cs typeface="Arial" pitchFamily="34" charset="-120"/>
               </a:rPr>
-              <a:t>Relaciones avanzadas: extensión («extend»)</a:t>
+              <a:t>Relaciones avanzadas: inclusión («include»)</a:t>
             </a:r>
             <a:endParaRPr lang="en-US" sz="2300" dirty="0"/>
           </a:p>
@@ -6131,7 +8109,7 @@
         <p:spPr>
           <a:xfrm>
             <a:off x="548640" y="1097280"/>
-            <a:ext cx="11091672" cy="1463040"/>
+            <a:ext cx="11091672" cy="1737360"/>
           </a:xfrm>
           <a:prstGeom prst="rect">
             <a:avLst/>
@@ -6158,7 +8136,7 @@
                 <a:ea typeface="Arial" pitchFamily="34" charset="-122"/>
                 <a:cs typeface="Arial" pitchFamily="34" charset="-120"/>
               </a:rPr>
-              <a:t>•  Un caso de uso añade comportamiento OPCIONAL a otro cuando se cumple cierta condición. Es como un if en el flujo normal.</a:t>
+              <a:t>•  Un caso de uso SIEMPRE necesita ejecutar otro.</a:t>
             </a:r>
             <a:endParaRPr lang="en-US" sz="1600" dirty="0"/>
           </a:p>
@@ -6178,10 +8156,30 @@
                 <a:ea typeface="Arial" pitchFamily="34" charset="-122"/>
                 <a:cs typeface="Arial" pitchFamily="34" charset="-120"/>
               </a:rPr>
-              <a:t>•  Se dibuja igual que include (línea discontinua), pero la flecha apunta al caso BASE (el que se amplía).</a:t>
+              <a:t>•  Se usa cuando un comportamiento se repite en varios casos de uso y quieres evitar duplicarlo.</a:t>
             </a:r>
             <a:endParaRPr lang="en-US" sz="1600" dirty="0"/>
           </a:p>
+          <a:p>
+            <a:pPr indent="0" marL="0">
+              <a:spcAft>
+                <a:spcPts val="800"/>
+              </a:spcAft>
+              <a:buNone/>
+            </a:pPr>
+            <a:r>
+              <a:rPr lang="en-US" sz="1600" dirty="0">
+                <a:solidFill>
+                  <a:srgbClr val="212121"/>
+                </a:solidFill>
+                <a:latin typeface="Arial" pitchFamily="34" charset="0"/>
+                <a:ea typeface="Arial" pitchFamily="34" charset="-122"/>
+                <a:cs typeface="Arial" pitchFamily="34" charset="-120"/>
+              </a:rPr>
+              <a:t>•  Se dibuja con línea discontinua y flecha apuntando al caso INCLUIDO, etiquetada «include».</a:t>
+            </a:r>
+            <a:endParaRPr lang="en-US" sz="1600" dirty="0"/>
+          </a:p>
         </p:txBody>
       </p:sp>
       <p:sp>
@@ -6192,8 +8190,8 @@
         </p:nvSpPr>
         <p:spPr>
           <a:xfrm>
-            <a:off x="1463040" y="3200400"/>
-            <a:ext cx="2834640" cy="777240"/>
+            <a:off x="1463040" y="3383280"/>
+            <a:ext cx="2468880" cy="777240"/>
           </a:xfrm>
           <a:prstGeom prst="ellipse">
             <a:avLst/>
@@ -6217,8 +8215,8 @@
         </p:nvSpPr>
         <p:spPr>
           <a:xfrm>
-            <a:off x="1463040" y="3200400"/>
-            <a:ext cx="2834640" cy="777240"/>
+            <a:off x="1463040" y="3383280"/>
+            <a:ext cx="2468880" cy="777240"/>
           </a:xfrm>
           <a:prstGeom prst="rect">
             <a:avLst/>
@@ -6234,7 +8232,7 @@
               <a:buNone/>
             </a:pPr>
             <a:r>
-              <a:rPr lang="en-US" sz="1300" dirty="0">
+              <a:rPr lang="en-US" sz="1400" dirty="0">
                 <a:solidFill>
                   <a:srgbClr val="212121"/>
                 </a:solidFill>
@@ -6242,9 +8240,9 @@
                 <a:ea typeface="Arial" pitchFamily="34" charset="-122"/>
                 <a:cs typeface="Arial" pitchFamily="34" charset="-120"/>
               </a:rPr>
-              <a:t>Aplicar cupón descuento</a:t>
-            </a:r>
-            <a:endParaRPr lang="en-US" sz="1300" dirty="0"/>
+              <a:t>Realizar pedido</a:t>
+            </a:r>
+            <a:endParaRPr lang="en-US" sz="1400" dirty="0"/>
           </a:p>
         </p:txBody>
       </p:sp>
@@ -6256,7 +8254,7 @@
         </p:nvSpPr>
         <p:spPr>
           <a:xfrm>
-            <a:off x="7863840" y="3200400"/>
+            <a:off x="7863840" y="3383280"/>
             <a:ext cx="2468880" cy="777240"/>
           </a:xfrm>
           <a:prstGeom prst="ellipse">
@@ -6281,7 +8279,7 @@
         </p:nvSpPr>
         <p:spPr>
           <a:xfrm>
-            <a:off x="7863840" y="3200400"/>
+            <a:off x="7863840" y="3383280"/>
             <a:ext cx="2468880" cy="777240"/>
           </a:xfrm>
           <a:prstGeom prst="rect">
@@ -6306,7 +8304,7 @@
                 <a:ea typeface="Arial" pitchFamily="34" charset="-122"/>
                 <a:cs typeface="Arial" pitchFamily="34" charset="-120"/>
               </a:rPr>
-              <a:t>Pagar pedido</a:t>
+              <a:t>Iniciar sesión</a:t>
             </a:r>
             <a:endParaRPr lang="en-US" sz="1400" dirty="0"/>
           </a:p>
@@ -6320,8 +8318,8 @@
         </p:nvSpPr>
         <p:spPr>
           <a:xfrm>
-            <a:off x="4297680" y="3584448"/>
-            <a:ext cx="3566160" cy="0"/>
+            <a:off x="3931920" y="3767328"/>
+            <a:ext cx="3931920" cy="0"/>
           </a:xfrm>
           <a:prstGeom prst="line">
             <a:avLst/>
@@ -6344,7 +8342,7 @@
         </p:nvSpPr>
         <p:spPr>
           <a:xfrm>
-            <a:off x="5166360" y="3246120"/>
+            <a:off x="4983480" y="3429000"/>
             <a:ext cx="1828800" cy="274320"/>
           </a:xfrm>
           <a:prstGeom prst="rect">
@@ -6369,7 +8367,7 @@
                 <a:ea typeface="Arial" pitchFamily="34" charset="-122"/>
                 <a:cs typeface="Arial" pitchFamily="34" charset="-120"/>
               </a:rPr>
-              <a:t>«extend»</a:t>
+              <a:t>«include»</a:t>
             </a:r>
             <a:endParaRPr lang="en-US" sz="1100" dirty="0"/>
           </a:p>
@@ -6383,7 +8381,7 @@
         </p:nvSpPr>
         <p:spPr>
           <a:xfrm>
-            <a:off x="548640" y="4663440"/>
+            <a:off x="548640" y="4846320"/>
             <a:ext cx="11091672" cy="914400"/>
           </a:xfrm>
           <a:prstGeom prst="roundRect">
@@ -6408,7 +8406,7 @@
         </p:nvSpPr>
         <p:spPr>
           <a:xfrm>
-            <a:off x="777240" y="4736592"/>
+            <a:off x="777240" y="4919472"/>
             <a:ext cx="10634472" cy="768096"/>
           </a:xfrm>
           <a:prstGeom prst="rect">
@@ -6433,7 +8431,7 @@
                 <a:ea typeface="Arial" pitchFamily="34" charset="-122"/>
                 <a:cs typeface="Arial" pitchFamily="34" charset="-120"/>
               </a:rPr>
-              <a:t>Ejemplo: "Aplicar cupón de descuento" extiende "Pagar pedido" — solo se ejecuta si el usuario tiene un cupón válido. La flecha sale del opcional hacia el caso base.</a:t>
+              <a:t>Ejemplo: "Realizar pedido" y "Consultar historial" incluyen "Iniciar sesión", porque ambos requieren que el usuario esté autenticado — siempre, sin condición.</a:t>
             </a:r>
             <a:endParaRPr lang="en-US" sz="1500" dirty="0"/>
           </a:p>
@@ -6561,670 +8559,188 @@
                 <a:ea typeface="Arial" pitchFamily="34" charset="-122"/>
                 <a:cs typeface="Arial" pitchFamily="34" charset="-120"/>
               </a:rPr>
-              <a:t>La regla de las flechas (cae en examen)</a:t>
+              <a:t>En DIA — configurar «include»</a:t>
             </a:r>
             <a:endParaRPr lang="en-US" sz="2300" dirty="0"/>
           </a:p>
         </p:txBody>
       </p:sp>
-      <p:graphicFrame>
-        <p:nvGraphicFramePr>
-          <p:cNvPr id="9" name="Table 0"/>
-          <p:cNvGraphicFramePr>
-            <a:graphicFrameLocks noGrp="1"/>
-          </p:cNvGraphicFramePr>
-          <p:nvPr>
-            <p:extLst>
-              <p:ext uri="{D42A27DB-BD31-4B8C-83A1-F6EECF244321}">
-                <p14:modId xmlns:p14="http://schemas.microsoft.com/office/powerpoint/2010/main" val="1579011935"/>
-              </p:ext>
-            </p:extLst>
-          </p:nvPr>
-        </p:nvGraphicFramePr>
-        <p:xfrm>
-          <a:off x="548640" y="1234440"/>
-          <a:ext cx="11091672" cy="914400"/>
-        </p:xfrm>
-        <a:graphic>
-          <a:graphicData uri="http://schemas.openxmlformats.org/drawingml/2006/table">
-            <a:tbl>
-              <a:tblPr/>
-              <a:tblGrid>
-                <a:gridCol w="2218334"/>
-                <a:gridCol w="4658502"/>
-                <a:gridCol w="4214835"/>
-              </a:tblGrid>
-              <a:tr h="777240">
-                <a:tc>
-                  <a:txBody>
-                    <a:bodyPr/>
-                    <a:lstStyle/>
-                    <a:p>
-                      <a:pPr algn="ctr" indent="0" marL="0">
-                        <a:buNone/>
-                      </a:pPr>
-                      <a:r>
-                        <a:rPr lang="en-US" sz="1500" b="1" dirty="0">
-                          <a:solidFill>
-                            <a:srgbClr val="FFFFFF"/>
-                          </a:solidFill>
-                          <a:latin typeface="Arial" pitchFamily="34" charset="0"/>
-                          <a:ea typeface="Arial" pitchFamily="34" charset="-122"/>
-                          <a:cs typeface="Arial" pitchFamily="34" charset="-120"/>
-                        </a:rPr>
-                        <a:t>Relación</a:t>
-                      </a:r>
-                      <a:endParaRPr lang="en-US" sz="1500" dirty="0">
-                        <a:latin typeface="Arial" charset="0"/>
-                        <a:ea typeface="Arial" charset="0"/>
-                        <a:cs typeface="Arial" charset="0"/>
-                      </a:endParaRPr>
-                    </a:p>
-                  </a:txBody>
-                  <a:tcPr marL="54864" marR="54864" marT="54864" marB="54864" anchor="ctr">
-                    <a:lnL w="12700" cap="flat" cmpd="sng" algn="ctr">
-                      <a:solidFill>
-                        <a:srgbClr val="EEEEEE"/>
-                      </a:solidFill>
-                      <a:prstDash val="solid"/>
-                      <a:round/>
-                      <a:headEnd type="none" w="med" len="med"/>
-                      <a:tailEnd type="none" w="med" len="med"/>
-                    </a:lnL>
-                    <a:lnR w="12700" cap="flat" cmpd="sng" algn="ctr">
-                      <a:solidFill>
-                        <a:srgbClr val="EEEEEE"/>
-                      </a:solidFill>
-                      <a:prstDash val="solid"/>
-                      <a:round/>
-                      <a:headEnd type="none" w="med" len="med"/>
-                      <a:tailEnd type="none" w="med" len="med"/>
-                    </a:lnR>
-                    <a:lnT w="12700" cap="flat" cmpd="sng" algn="ctr">
-                      <a:solidFill>
-                        <a:srgbClr val="EEEEEE"/>
-                      </a:solidFill>
-                      <a:prstDash val="solid"/>
-                      <a:round/>
-                      <a:headEnd type="none" w="med" len="med"/>
-                      <a:tailEnd type="none" w="med" len="med"/>
-                    </a:lnT>
-                    <a:lnB w="12700" cap="flat" cmpd="sng" algn="ctr">
-                      <a:solidFill>
-                        <a:srgbClr val="EEEEEE"/>
-                      </a:solidFill>
-                      <a:prstDash val="solid"/>
-                      <a:round/>
-                      <a:headEnd type="none" w="med" len="med"/>
-                      <a:tailEnd type="none" w="med" len="med"/>
-                    </a:lnB>
-                    <a:solidFill>
-                      <a:srgbClr val="3F51B5"/>
-                    </a:solidFill>
-                  </a:tcPr>
-                </a:tc>
-                <a:tc>
-                  <a:txBody>
-                    <a:bodyPr/>
-                    <a:lstStyle/>
-                    <a:p>
-                      <a:pPr algn="ctr" indent="0" marL="0">
-                        <a:buNone/>
-                      </a:pPr>
-                      <a:r>
-                        <a:rPr lang="en-US" sz="1500" b="1" dirty="0">
-                          <a:solidFill>
-                            <a:srgbClr val="FFFFFF"/>
-                          </a:solidFill>
-                          <a:latin typeface="Arial" pitchFamily="34" charset="0"/>
-                          <a:ea typeface="Arial" pitchFamily="34" charset="-122"/>
-                          <a:cs typeface="Arial" pitchFamily="34" charset="-120"/>
-                        </a:rPr>
-                        <a:t>La flecha apunta a...</a:t>
-                      </a:r>
-                      <a:endParaRPr lang="en-US" sz="1500" dirty="0">
-                        <a:latin typeface="Arial" charset="0"/>
-                        <a:ea typeface="Arial" charset="0"/>
-                        <a:cs typeface="Arial" charset="0"/>
-                      </a:endParaRPr>
-                    </a:p>
-                  </a:txBody>
-                  <a:tcPr marL="54864" marR="54864" marT="54864" marB="54864" anchor="ctr">
-                    <a:lnL w="12700" cap="flat" cmpd="sng" algn="ctr">
-                      <a:solidFill>
-                        <a:srgbClr val="EEEEEE"/>
-                      </a:solidFill>
-                      <a:prstDash val="solid"/>
-                      <a:round/>
-                      <a:headEnd type="none" w="med" len="med"/>
-                      <a:tailEnd type="none" w="med" len="med"/>
-                    </a:lnL>
-                    <a:lnR w="12700" cap="flat" cmpd="sng" algn="ctr">
-                      <a:solidFill>
-                        <a:srgbClr val="EEEEEE"/>
-                      </a:solidFill>
-                      <a:prstDash val="solid"/>
-                      <a:round/>
-                      <a:headEnd type="none" w="med" len="med"/>
-                      <a:tailEnd type="none" w="med" len="med"/>
-                    </a:lnR>
-                    <a:lnT w="12700" cap="flat" cmpd="sng" algn="ctr">
-                      <a:solidFill>
-                        <a:srgbClr val="EEEEEE"/>
-                      </a:solidFill>
-                      <a:prstDash val="solid"/>
-                      <a:round/>
-                      <a:headEnd type="none" w="med" len="med"/>
-                      <a:tailEnd type="none" w="med" len="med"/>
-                    </a:lnT>
-                    <a:lnB w="12700" cap="flat" cmpd="sng" algn="ctr">
-                      <a:solidFill>
-                        <a:srgbClr val="EEEEEE"/>
-                      </a:solidFill>
-                      <a:prstDash val="solid"/>
-                      <a:round/>
-                      <a:headEnd type="none" w="med" len="med"/>
-                      <a:tailEnd type="none" w="med" len="med"/>
-                    </a:lnB>
-                    <a:solidFill>
-                      <a:srgbClr val="3F51B5"/>
-                    </a:solidFill>
-                  </a:tcPr>
-                </a:tc>
-                <a:tc>
-                  <a:txBody>
-                    <a:bodyPr/>
-                    <a:lstStyle/>
-                    <a:p>
-                      <a:pPr algn="ctr" indent="0" marL="0">
-                        <a:buNone/>
-                      </a:pPr>
-                      <a:r>
-                        <a:rPr lang="en-US" sz="1500" b="1" dirty="0">
-                          <a:solidFill>
-                            <a:srgbClr val="FFFFFF"/>
-                          </a:solidFill>
-                          <a:latin typeface="Arial" pitchFamily="34" charset="0"/>
-                          <a:ea typeface="Arial" pitchFamily="34" charset="-122"/>
-                          <a:cs typeface="Arial" pitchFamily="34" charset="-120"/>
-                        </a:rPr>
-                        <a:t>Ejemplo</a:t>
-                      </a:r>
-                      <a:endParaRPr lang="en-US" sz="1500" dirty="0">
-                        <a:latin typeface="Arial" charset="0"/>
-                        <a:ea typeface="Arial" charset="0"/>
-                        <a:cs typeface="Arial" charset="0"/>
-                      </a:endParaRPr>
-                    </a:p>
-                  </a:txBody>
-                  <a:tcPr marL="54864" marR="54864" marT="54864" marB="54864" anchor="ctr">
-                    <a:lnL w="12700" cap="flat" cmpd="sng" algn="ctr">
-                      <a:solidFill>
-                        <a:srgbClr val="EEEEEE"/>
-                      </a:solidFill>
-                      <a:prstDash val="solid"/>
-                      <a:round/>
-                      <a:headEnd type="none" w="med" len="med"/>
-                      <a:tailEnd type="none" w="med" len="med"/>
-                    </a:lnL>
-                    <a:lnR w="12700" cap="flat" cmpd="sng" algn="ctr">
-                      <a:solidFill>
-                        <a:srgbClr val="EEEEEE"/>
-                      </a:solidFill>
-                      <a:prstDash val="solid"/>
-                      <a:round/>
-                      <a:headEnd type="none" w="med" len="med"/>
-                      <a:tailEnd type="none" w="med" len="med"/>
-                    </a:lnR>
-                    <a:lnT w="12700" cap="flat" cmpd="sng" algn="ctr">
-                      <a:solidFill>
-                        <a:srgbClr val="EEEEEE"/>
-                      </a:solidFill>
-                      <a:prstDash val="solid"/>
-                      <a:round/>
-                      <a:headEnd type="none" w="med" len="med"/>
-                      <a:tailEnd type="none" w="med" len="med"/>
-                    </a:lnT>
-                    <a:lnB w="12700" cap="flat" cmpd="sng" algn="ctr">
-                      <a:solidFill>
-                        <a:srgbClr val="EEEEEE"/>
-                      </a:solidFill>
-                      <a:prstDash val="solid"/>
-                      <a:round/>
-                      <a:headEnd type="none" w="med" len="med"/>
-                      <a:tailEnd type="none" w="med" len="med"/>
-                    </a:lnB>
-                    <a:solidFill>
-                      <a:srgbClr val="3F51B5"/>
-                    </a:solidFill>
-                  </a:tcPr>
-                </a:tc>
-              </a:tr>
-              <a:tr h="777240">
-                <a:tc>
-                  <a:txBody>
-                    <a:bodyPr/>
-                    <a:lstStyle/>
-                    <a:p>
-                      <a:pPr algn="l" indent="0" marL="0">
-                        <a:buNone/>
-                      </a:pPr>
-                      <a:r>
-                        <a:rPr lang="en-US" sz="1500" b="1" dirty="0">
-                          <a:solidFill>
-                            <a:srgbClr val="212121"/>
-                          </a:solidFill>
-                          <a:latin typeface="Arial" pitchFamily="34" charset="0"/>
-                          <a:ea typeface="Arial" pitchFamily="34" charset="-122"/>
-                          <a:cs typeface="Arial" pitchFamily="34" charset="-120"/>
-                        </a:rPr>
-                        <a:t>«include»</a:t>
-                      </a:r>
-                      <a:endParaRPr lang="en-US" sz="1500" dirty="0">
-                        <a:latin typeface="Arial" charset="0"/>
-                        <a:ea typeface="Arial" charset="0"/>
-                        <a:cs typeface="Arial" charset="0"/>
-                      </a:endParaRPr>
-                    </a:p>
-                  </a:txBody>
-                  <a:tcPr marL="54864" marR="54864" marT="54864" marB="54864" anchor="ctr">
-                    <a:lnL w="12700" cap="flat" cmpd="sng" algn="ctr">
-                      <a:solidFill>
-                        <a:srgbClr val="EEEEEE"/>
-                      </a:solidFill>
-                      <a:prstDash val="solid"/>
-                      <a:round/>
-                      <a:headEnd type="none" w="med" len="med"/>
-                      <a:tailEnd type="none" w="med" len="med"/>
-                    </a:lnL>
-                    <a:lnR w="12700" cap="flat" cmpd="sng" algn="ctr">
-                      <a:solidFill>
-                        <a:srgbClr val="EEEEEE"/>
-                      </a:solidFill>
-                      <a:prstDash val="solid"/>
-                      <a:round/>
-                      <a:headEnd type="none" w="med" len="med"/>
-                      <a:tailEnd type="none" w="med" len="med"/>
-                    </a:lnR>
-                    <a:lnT w="12700" cap="flat" cmpd="sng" algn="ctr">
-                      <a:solidFill>
-                        <a:srgbClr val="EEEEEE"/>
-                      </a:solidFill>
-                      <a:prstDash val="solid"/>
-                      <a:round/>
-                      <a:headEnd type="none" w="med" len="med"/>
-                      <a:tailEnd type="none" w="med" len="med"/>
-                    </a:lnT>
-                    <a:lnB w="12700" cap="flat" cmpd="sng" algn="ctr">
-                      <a:solidFill>
-                        <a:srgbClr val="EEEEEE"/>
-                      </a:solidFill>
-                      <a:prstDash val="solid"/>
-                      <a:round/>
-                      <a:headEnd type="none" w="med" len="med"/>
-                      <a:tailEnd type="none" w="med" len="med"/>
-                    </a:lnB>
-                    <a:solidFill>
-                      <a:srgbClr val="FFFFFF"/>
-                    </a:solidFill>
-                  </a:tcPr>
-                </a:tc>
-                <a:tc>
-                  <a:txBody>
-                    <a:bodyPr/>
-                    <a:lstStyle/>
-                    <a:p>
-                      <a:pPr algn="l" indent="0" marL="0">
-                        <a:buNone/>
-                      </a:pPr>
-                      <a:r>
-                        <a:rPr lang="en-US" sz="1500" dirty="0">
-                          <a:solidFill>
-                            <a:srgbClr val="212121"/>
-                          </a:solidFill>
-                          <a:latin typeface="Arial" pitchFamily="34" charset="0"/>
-                          <a:ea typeface="Arial" pitchFamily="34" charset="-122"/>
-                          <a:cs typeface="Arial" pitchFamily="34" charset="-120"/>
-                        </a:rPr>
-                        <a:t>el caso INCLUIDO (el trozo reutilizado)</a:t>
-                      </a:r>
-                      <a:endParaRPr lang="en-US" sz="1500" dirty="0">
-                        <a:latin typeface="Arial" charset="0"/>
-                        <a:ea typeface="Arial" charset="0"/>
-                        <a:cs typeface="Arial" charset="0"/>
-                      </a:endParaRPr>
-                    </a:p>
-                  </a:txBody>
-                  <a:tcPr marL="54864" marR="54864" marT="54864" marB="54864" anchor="ctr">
-                    <a:lnL w="12700" cap="flat" cmpd="sng" algn="ctr">
-                      <a:solidFill>
-                        <a:srgbClr val="EEEEEE"/>
-                      </a:solidFill>
-                      <a:prstDash val="solid"/>
-                      <a:round/>
-                      <a:headEnd type="none" w="med" len="med"/>
-                      <a:tailEnd type="none" w="med" len="med"/>
-                    </a:lnL>
-                    <a:lnR w="12700" cap="flat" cmpd="sng" algn="ctr">
-                      <a:solidFill>
-                        <a:srgbClr val="EEEEEE"/>
-                      </a:solidFill>
-                      <a:prstDash val="solid"/>
-                      <a:round/>
-                      <a:headEnd type="none" w="med" len="med"/>
-                      <a:tailEnd type="none" w="med" len="med"/>
-                    </a:lnR>
-                    <a:lnT w="12700" cap="flat" cmpd="sng" algn="ctr">
-                      <a:solidFill>
-                        <a:srgbClr val="EEEEEE"/>
-                      </a:solidFill>
-                      <a:prstDash val="solid"/>
-                      <a:round/>
-                      <a:headEnd type="none" w="med" len="med"/>
-                      <a:tailEnd type="none" w="med" len="med"/>
-                    </a:lnT>
-                    <a:lnB w="12700" cap="flat" cmpd="sng" algn="ctr">
-                      <a:solidFill>
-                        <a:srgbClr val="EEEEEE"/>
-                      </a:solidFill>
-                      <a:prstDash val="solid"/>
-                      <a:round/>
-                      <a:headEnd type="none" w="med" len="med"/>
-                      <a:tailEnd type="none" w="med" len="med"/>
-                    </a:lnB>
-                    <a:solidFill>
-                      <a:srgbClr val="FFFFFF"/>
-                    </a:solidFill>
-                  </a:tcPr>
-                </a:tc>
-                <a:tc>
-                  <a:txBody>
-                    <a:bodyPr/>
-                    <a:lstStyle/>
-                    <a:p>
-                      <a:pPr algn="l" indent="0" marL="0">
-                        <a:buNone/>
-                      </a:pPr>
-                      <a:r>
-                        <a:rPr lang="en-US" sz="1500" dirty="0">
-                          <a:solidFill>
-                            <a:srgbClr val="212121"/>
-                          </a:solidFill>
-                          <a:latin typeface="Arial" pitchFamily="34" charset="0"/>
-                          <a:ea typeface="Arial" pitchFamily="34" charset="-122"/>
-                          <a:cs typeface="Arial" pitchFamily="34" charset="-120"/>
-                        </a:rPr>
-                        <a:t>Realizar pedido ──▶ Iniciar sesión</a:t>
-                      </a:r>
-                      <a:endParaRPr lang="en-US" sz="1500" dirty="0">
-                        <a:latin typeface="Arial" charset="0"/>
-                        <a:ea typeface="Arial" charset="0"/>
-                        <a:cs typeface="Arial" charset="0"/>
-                      </a:endParaRPr>
-                    </a:p>
-                  </a:txBody>
-                  <a:tcPr marL="54864" marR="54864" marT="54864" marB="54864" anchor="ctr">
-                    <a:lnL w="12700" cap="flat" cmpd="sng" algn="ctr">
-                      <a:solidFill>
-                        <a:srgbClr val="EEEEEE"/>
-                      </a:solidFill>
-                      <a:prstDash val="solid"/>
-                      <a:round/>
-                      <a:headEnd type="none" w="med" len="med"/>
-                      <a:tailEnd type="none" w="med" len="med"/>
-                    </a:lnL>
-                    <a:lnR w="12700" cap="flat" cmpd="sng" algn="ctr">
-                      <a:solidFill>
-                        <a:srgbClr val="EEEEEE"/>
-                      </a:solidFill>
-                      <a:prstDash val="solid"/>
-                      <a:round/>
-                      <a:headEnd type="none" w="med" len="med"/>
-                      <a:tailEnd type="none" w="med" len="med"/>
-                    </a:lnR>
-                    <a:lnT w="12700" cap="flat" cmpd="sng" algn="ctr">
-                      <a:solidFill>
-                        <a:srgbClr val="EEEEEE"/>
-                      </a:solidFill>
-                      <a:prstDash val="solid"/>
-                      <a:round/>
-                      <a:headEnd type="none" w="med" len="med"/>
-                      <a:tailEnd type="none" w="med" len="med"/>
-                    </a:lnT>
-                    <a:lnB w="12700" cap="flat" cmpd="sng" algn="ctr">
-                      <a:solidFill>
-                        <a:srgbClr val="EEEEEE"/>
-                      </a:solidFill>
-                      <a:prstDash val="solid"/>
-                      <a:round/>
-                      <a:headEnd type="none" w="med" len="med"/>
-                      <a:tailEnd type="none" w="med" len="med"/>
-                    </a:lnB>
-                    <a:solidFill>
-                      <a:srgbClr val="FFFFFF"/>
-                    </a:solidFill>
-                  </a:tcPr>
-                </a:tc>
-              </a:tr>
-              <a:tr h="777240">
-                <a:tc>
-                  <a:txBody>
-                    <a:bodyPr/>
-                    <a:lstStyle/>
-                    <a:p>
-                      <a:pPr algn="l" indent="0" marL="0">
-                        <a:buNone/>
-                      </a:pPr>
-                      <a:r>
-                        <a:rPr lang="en-US" sz="1500" b="1" dirty="0">
-                          <a:solidFill>
-                            <a:srgbClr val="212121"/>
-                          </a:solidFill>
-                          <a:latin typeface="Arial" pitchFamily="34" charset="0"/>
-                          <a:ea typeface="Arial" pitchFamily="34" charset="-122"/>
-                          <a:cs typeface="Arial" pitchFamily="34" charset="-120"/>
-                        </a:rPr>
-                        <a:t>«extend»</a:t>
-                      </a:r>
-                      <a:endParaRPr lang="en-US" sz="1500" dirty="0">
-                        <a:latin typeface="Arial" charset="0"/>
-                        <a:ea typeface="Arial" charset="0"/>
-                        <a:cs typeface="Arial" charset="0"/>
-                      </a:endParaRPr>
-                    </a:p>
-                  </a:txBody>
-                  <a:tcPr marL="54864" marR="54864" marT="54864" marB="54864" anchor="ctr">
-                    <a:lnL w="12700" cap="flat" cmpd="sng" algn="ctr">
-                      <a:solidFill>
-                        <a:srgbClr val="EEEEEE"/>
-                      </a:solidFill>
-                      <a:prstDash val="solid"/>
-                      <a:round/>
-                      <a:headEnd type="none" w="med" len="med"/>
-                      <a:tailEnd type="none" w="med" len="med"/>
-                    </a:lnL>
-                    <a:lnR w="12700" cap="flat" cmpd="sng" algn="ctr">
-                      <a:solidFill>
-                        <a:srgbClr val="EEEEEE"/>
-                      </a:solidFill>
-                      <a:prstDash val="solid"/>
-                      <a:round/>
-                      <a:headEnd type="none" w="med" len="med"/>
-                      <a:tailEnd type="none" w="med" len="med"/>
-                    </a:lnR>
-                    <a:lnT w="12700" cap="flat" cmpd="sng" algn="ctr">
-                      <a:solidFill>
-                        <a:srgbClr val="EEEEEE"/>
-                      </a:solidFill>
-                      <a:prstDash val="solid"/>
-                      <a:round/>
-                      <a:headEnd type="none" w="med" len="med"/>
-                      <a:tailEnd type="none" w="med" len="med"/>
-                    </a:lnT>
-                    <a:lnB w="12700" cap="flat" cmpd="sng" algn="ctr">
-                      <a:solidFill>
-                        <a:srgbClr val="EEEEEE"/>
-                      </a:solidFill>
-                      <a:prstDash val="solid"/>
-                      <a:round/>
-                      <a:headEnd type="none" w="med" len="med"/>
-                      <a:tailEnd type="none" w="med" len="med"/>
-                    </a:lnB>
-                    <a:solidFill>
-                      <a:srgbClr val="F5F5F5"/>
-                    </a:solidFill>
-                  </a:tcPr>
-                </a:tc>
-                <a:tc>
-                  <a:txBody>
-                    <a:bodyPr/>
-                    <a:lstStyle/>
-                    <a:p>
-                      <a:pPr algn="l" indent="0" marL="0">
-                        <a:buNone/>
-                      </a:pPr>
-                      <a:r>
-                        <a:rPr lang="en-US" sz="1500" dirty="0">
-                          <a:solidFill>
-                            <a:srgbClr val="212121"/>
-                          </a:solidFill>
-                          <a:latin typeface="Arial" pitchFamily="34" charset="0"/>
-                          <a:ea typeface="Arial" pitchFamily="34" charset="-122"/>
-                          <a:cs typeface="Arial" pitchFamily="34" charset="-120"/>
-                        </a:rPr>
-                        <a:t>el caso BASE (el que se amplía)</a:t>
-                      </a:r>
-                      <a:endParaRPr lang="en-US" sz="1500" dirty="0">
-                        <a:latin typeface="Arial" charset="0"/>
-                        <a:ea typeface="Arial" charset="0"/>
-                        <a:cs typeface="Arial" charset="0"/>
-                      </a:endParaRPr>
-                    </a:p>
-                  </a:txBody>
-                  <a:tcPr marL="54864" marR="54864" marT="54864" marB="54864" anchor="ctr">
-                    <a:lnL w="12700" cap="flat" cmpd="sng" algn="ctr">
-                      <a:solidFill>
-                        <a:srgbClr val="EEEEEE"/>
-                      </a:solidFill>
-                      <a:prstDash val="solid"/>
-                      <a:round/>
-                      <a:headEnd type="none" w="med" len="med"/>
-                      <a:tailEnd type="none" w="med" len="med"/>
-                    </a:lnL>
-                    <a:lnR w="12700" cap="flat" cmpd="sng" algn="ctr">
-                      <a:solidFill>
-                        <a:srgbClr val="EEEEEE"/>
-                      </a:solidFill>
-                      <a:prstDash val="solid"/>
-                      <a:round/>
-                      <a:headEnd type="none" w="med" len="med"/>
-                      <a:tailEnd type="none" w="med" len="med"/>
-                    </a:lnR>
-                    <a:lnT w="12700" cap="flat" cmpd="sng" algn="ctr">
-                      <a:solidFill>
-                        <a:srgbClr val="EEEEEE"/>
-                      </a:solidFill>
-                      <a:prstDash val="solid"/>
-                      <a:round/>
-                      <a:headEnd type="none" w="med" len="med"/>
-                      <a:tailEnd type="none" w="med" len="med"/>
-                    </a:lnT>
-                    <a:lnB w="12700" cap="flat" cmpd="sng" algn="ctr">
-                      <a:solidFill>
-                        <a:srgbClr val="EEEEEE"/>
-                      </a:solidFill>
-                      <a:prstDash val="solid"/>
-                      <a:round/>
-                      <a:headEnd type="none" w="med" len="med"/>
-                      <a:tailEnd type="none" w="med" len="med"/>
-                    </a:lnB>
-                    <a:solidFill>
-                      <a:srgbClr val="F5F5F5"/>
-                    </a:solidFill>
-                  </a:tcPr>
-                </a:tc>
-                <a:tc>
-                  <a:txBody>
-                    <a:bodyPr/>
-                    <a:lstStyle/>
-                    <a:p>
-                      <a:pPr algn="l" indent="0" marL="0">
-                        <a:buNone/>
-                      </a:pPr>
-                      <a:r>
-                        <a:rPr lang="en-US" sz="1500" dirty="0">
-                          <a:solidFill>
-                            <a:srgbClr val="212121"/>
-                          </a:solidFill>
-                          <a:latin typeface="Arial" pitchFamily="34" charset="0"/>
-                          <a:ea typeface="Arial" pitchFamily="34" charset="-122"/>
-                          <a:cs typeface="Arial" pitchFamily="34" charset="-120"/>
-                        </a:rPr>
-                        <a:t>Aplicar cupón ──▶ Pagar pedido</a:t>
-                      </a:r>
-                      <a:endParaRPr lang="en-US" sz="1500" dirty="0">
-                        <a:latin typeface="Arial" charset="0"/>
-                        <a:ea typeface="Arial" charset="0"/>
-                        <a:cs typeface="Arial" charset="0"/>
-                      </a:endParaRPr>
-                    </a:p>
-                  </a:txBody>
-                  <a:tcPr marL="54864" marR="54864" marT="54864" marB="54864" anchor="ctr">
-                    <a:lnL w="12700" cap="flat" cmpd="sng" algn="ctr">
-                      <a:solidFill>
-                        <a:srgbClr val="EEEEEE"/>
-                      </a:solidFill>
-                      <a:prstDash val="solid"/>
-                      <a:round/>
-                      <a:headEnd type="none" w="med" len="med"/>
-                      <a:tailEnd type="none" w="med" len="med"/>
-                    </a:lnL>
-                    <a:lnR w="12700" cap="flat" cmpd="sng" algn="ctr">
-                      <a:solidFill>
-                        <a:srgbClr val="EEEEEE"/>
-                      </a:solidFill>
-                      <a:prstDash val="solid"/>
-                      <a:round/>
-                      <a:headEnd type="none" w="med" len="med"/>
-                      <a:tailEnd type="none" w="med" len="med"/>
-                    </a:lnR>
-                    <a:lnT w="12700" cap="flat" cmpd="sng" algn="ctr">
-                      <a:solidFill>
-                        <a:srgbClr val="EEEEEE"/>
-                      </a:solidFill>
-                      <a:prstDash val="solid"/>
-                      <a:round/>
-                      <a:headEnd type="none" w="med" len="med"/>
-                      <a:tailEnd type="none" w="med" len="med"/>
-                    </a:lnT>
-                    <a:lnB w="12700" cap="flat" cmpd="sng" algn="ctr">
-                      <a:solidFill>
-                        <a:srgbClr val="EEEEEE"/>
-                      </a:solidFill>
-                      <a:prstDash val="solid"/>
-                      <a:round/>
-                      <a:headEnd type="none" w="med" len="med"/>
-                      <a:tailEnd type="none" w="med" len="med"/>
-                    </a:lnB>
-                    <a:solidFill>
-                      <a:srgbClr val="F5F5F5"/>
-                    </a:solidFill>
-                  </a:tcPr>
-                </a:tc>
-              </a:tr>
-            </a:tbl>
-          </a:graphicData>
-        </a:graphic>
-      </p:graphicFrame>
-      <p:sp>
-        <p:nvSpPr>
-          <p:cNvPr id="5" name="Shape 2"/>
-          <p:cNvSpPr/>
-          <p:nvPr/>
-        </p:nvSpPr>
-        <p:spPr>
-          <a:xfrm>
-            <a:off x="548640" y="3657600"/>
+      <p:sp>
+        <p:nvSpPr>
+          <p:cNvPr id="4" name="Text 2"/>
+          <p:cNvSpPr/>
+          <p:nvPr/>
+        </p:nvSpPr>
+        <p:spPr>
+          <a:xfrm>
+            <a:off x="548640" y="1188720"/>
+            <a:ext cx="6309360" cy="2377440"/>
+          </a:xfrm>
+          <a:prstGeom prst="rect">
+            <a:avLst/>
+          </a:prstGeom>
+          <a:noFill/>
+          <a:ln/>
+        </p:spPr>
+        <p:txBody>
+          <a:bodyPr wrap="square" rtlCol="0" anchor="t"/>
+          <a:lstStyle/>
+          <a:p>
+            <a:pPr indent="0" marL="0">
+              <a:spcAft>
+                <a:spcPts val="1000"/>
+              </a:spcAft>
+              <a:buNone/>
+            </a:pPr>
+            <a:r>
+              <a:rPr lang="en-US" sz="1700" dirty="0">
+                <a:solidFill>
+                  <a:srgbClr val="212121"/>
+                </a:solidFill>
+                <a:latin typeface="Arial" pitchFamily="34" charset="0"/>
+                <a:ea typeface="Arial" pitchFamily="34" charset="-122"/>
+                <a:cs typeface="Arial" pitchFamily="34" charset="-120"/>
+              </a:rPr>
+              <a:t>•  Usa la herramienta UML - Dependency de la paleta: es la línea punteada con flecha.</a:t>
+            </a:r>
+            <a:endParaRPr lang="en-US" sz="1700" dirty="0"/>
+          </a:p>
+          <a:p>
+            <a:pPr indent="0" marL="0">
+              <a:spcAft>
+                <a:spcPts val="1000"/>
+              </a:spcAft>
+              <a:buNone/>
+            </a:pPr>
+            <a:r>
+              <a:rPr lang="en-US" sz="1700" dirty="0">
+                <a:solidFill>
+                  <a:srgbClr val="212121"/>
+                </a:solidFill>
+                <a:latin typeface="Arial" pitchFamily="34" charset="0"/>
+                <a:ea typeface="Arial" pitchFamily="34" charset="-122"/>
+                <a:cs typeface="Arial" pitchFamily="34" charset="-120"/>
+              </a:rPr>
+              <a:t>•  Haz doble clic sobre la línea ya dibujada.</a:t>
+            </a:r>
+            <a:endParaRPr lang="en-US" sz="1700" dirty="0"/>
+          </a:p>
+          <a:p>
+            <a:pPr indent="0" marL="0">
+              <a:spcAft>
+                <a:spcPts val="1000"/>
+              </a:spcAft>
+              <a:buNone/>
+            </a:pPr>
+            <a:r>
+              <a:rPr lang="en-US" sz="1700" dirty="0">
+                <a:solidFill>
+                  <a:srgbClr val="212121"/>
+                </a:solidFill>
+                <a:latin typeface="Arial" pitchFamily="34" charset="0"/>
+                <a:ea typeface="Arial" pitchFamily="34" charset="-122"/>
+                <a:cs typeface="Arial" pitchFamily="34" charset="-120"/>
+              </a:rPr>
+              <a:t>•  En el campo Estereotipo escribe include.</a:t>
+            </a:r>
+            <a:endParaRPr lang="en-US" sz="1700" dirty="0"/>
+          </a:p>
+        </p:txBody>
+      </p:sp>
+      <p:sp>
+        <p:nvSpPr>
+          <p:cNvPr id="5" name="Shape 3"/>
+          <p:cNvSpPr/>
+          <p:nvPr/>
+        </p:nvSpPr>
+        <p:spPr>
+          <a:xfrm>
+            <a:off x="7406640" y="1280160"/>
+            <a:ext cx="4023360" cy="2267712"/>
+          </a:xfrm>
+          <a:prstGeom prst="rect">
+            <a:avLst/>
+          </a:prstGeom>
+          <a:ln w="12700">
+            <a:solidFill>
+              <a:srgbClr val="EEEEEE"/>
+            </a:solidFill>
+            <a:prstDash val="solid"/>
+          </a:ln>
+        </p:spPr>
+      </p:sp>
+      <p:pic>
+        <p:nvPicPr>
+          <p:cNvPr id="6" name="Image 0" descr="C:/Users/Aitor/Documents/apuntes-profe/entornos-de-desarrollo/docs/tema6/img/casos-include-propiedades.png">    </p:cNvPr>
+          <p:cNvPicPr>
+            <a:picLocks noChangeAspect="1"/>
+          </p:cNvPicPr>
+          <p:nvPr/>
+        </p:nvPicPr>
+        <p:blipFill>
+          <a:blip r:embed="rId1"/>
+          <a:stretch>
+            <a:fillRect/>
+          </a:stretch>
+        </p:blipFill>
+        <p:spPr>
+          <a:xfrm>
+            <a:off x="7406640" y="1280160"/>
+            <a:ext cx="4023360" cy="2267712"/>
+          </a:xfrm>
+          <a:prstGeom prst="rect">
+            <a:avLst/>
+          </a:prstGeom>
+        </p:spPr>
+      </p:pic>
+      <p:sp>
+        <p:nvSpPr>
+          <p:cNvPr id="7" name="Text 4"/>
+          <p:cNvSpPr/>
+          <p:nvPr/>
+        </p:nvSpPr>
+        <p:spPr>
+          <a:xfrm>
+            <a:off x="7132320" y="3575304"/>
+            <a:ext cx="4572000" cy="320040"/>
+          </a:xfrm>
+          <a:prstGeom prst="rect">
+            <a:avLst/>
+          </a:prstGeom>
+          <a:noFill/>
+          <a:ln/>
+        </p:spPr>
+        <p:txBody>
+          <a:bodyPr wrap="square" rtlCol="0" anchor="t"/>
+          <a:lstStyle/>
+          <a:p>
+            <a:pPr algn="ctr" indent="0" marL="0">
+              <a:buNone/>
+            </a:pPr>
+            <a:r>
+              <a:rPr lang="en-US" sz="1100" i="1" dirty="0">
+                <a:solidFill>
+                  <a:srgbClr val="757575"/>
+                </a:solidFill>
+                <a:latin typeface="Arial" pitchFamily="34" charset="0"/>
+                <a:ea typeface="Arial" pitchFamily="34" charset="-122"/>
+                <a:cs typeface="Arial" pitchFamily="34" charset="-120"/>
+              </a:rPr>
+              <a:t>Propiedades de la relación «include» en DIA: estereotipo "include" y flecha activada</a:t>
+            </a:r>
+            <a:endParaRPr lang="en-US" sz="1100" dirty="0"/>
+          </a:p>
+        </p:txBody>
+      </p:sp>
+      <p:sp>
+        <p:nvSpPr>
+          <p:cNvPr id="8" name="Shape 5"/>
+          <p:cNvSpPr/>
+          <p:nvPr/>
+        </p:nvSpPr>
+        <p:spPr>
+          <a:xfrm>
+            <a:off x="548640" y="4754880"/>
             <a:ext cx="11091672" cy="914400"/>
           </a:xfrm>
           <a:prstGeom prst="roundRect">
@@ -7243,13 +8759,13 @@
       </p:sp>
       <p:sp>
         <p:nvSpPr>
-          <p:cNvPr id="6" name="Text 3"/>
-          <p:cNvSpPr/>
-          <p:nvPr/>
-        </p:nvSpPr>
-        <p:spPr>
-          <a:xfrm>
-            <a:off x="777240" y="3730752"/>
+          <p:cNvPr id="9" name="Text 6"/>
+          <p:cNvSpPr/>
+          <p:nvPr/>
+        </p:nvSpPr>
+        <p:spPr>
+          <a:xfrm>
+            <a:off x="777240" y="4828032"/>
             <a:ext cx="10634472" cy="768096"/>
           </a:xfrm>
           <a:prstGeom prst="rect">
@@ -7274,7 +8790,7 @@
                 <a:ea typeface="Arial" pitchFamily="34" charset="-122"/>
                 <a:cs typeface="Arial" pitchFamily="34" charset="-120"/>
               </a:rPr>
-              <a:t>Truco: la flecha siempre sale del caso que "manda ejecutar" hacia el que completa la historia. En include manda el grande; en extend, el opcional se ofrece al grande.</a:t>
+              <a:t>El estereotipo es lo único que distingue «include» de «extend»: la línea y la flecha se dibujan exactamente igual.</a:t>
             </a:r>
             <a:endParaRPr lang="en-US" sz="1500" dirty="0"/>
           </a:p>
@@ -7282,71 +8798,7 @@
       </p:sp>
       <p:sp>
         <p:nvSpPr>
-          <p:cNvPr id="7" name="Shape 4"/>
-          <p:cNvSpPr/>
-          <p:nvPr/>
-        </p:nvSpPr>
-        <p:spPr>
-          <a:xfrm>
-            <a:off x="548640" y="4846320"/>
-            <a:ext cx="11091672" cy="777240"/>
-          </a:xfrm>
-          <a:prstGeom prst="roundRect">
-            <a:avLst/>
-          </a:prstGeom>
-          <a:solidFill>
-            <a:srgbClr val="FFF8E1"/>
-          </a:solidFill>
-          <a:ln w="19050">
-            <a:solidFill>
-              <a:srgbClr val="F9A825"/>
-            </a:solidFill>
-            <a:prstDash val="solid"/>
-          </a:ln>
-        </p:spPr>
-      </p:sp>
-      <p:sp>
-        <p:nvSpPr>
-          <p:cNvPr id="8" name="Text 5"/>
-          <p:cNvSpPr/>
-          <p:nvPr/>
-        </p:nvSpPr>
-        <p:spPr>
-          <a:xfrm>
-            <a:off x="777240" y="4919472"/>
-            <a:ext cx="10634472" cy="630936"/>
-          </a:xfrm>
-          <a:prstGeom prst="rect">
-            <a:avLst/>
-          </a:prstGeom>
-          <a:noFill/>
-          <a:ln/>
-        </p:spPr>
-        <p:txBody>
-          <a:bodyPr wrap="square" rtlCol="0" anchor="ctr"/>
-          <a:lstStyle/>
-          <a:p>
-            <a:pPr indent="0" marL="0">
-              <a:buNone/>
-            </a:pPr>
-            <a:r>
-              <a:rPr lang="en-US" sz="1400" dirty="0">
-                <a:solidFill>
-                  <a:srgbClr val="212121"/>
-                </a:solidFill>
-                <a:latin typeface="Arial" pitchFamily="34" charset="0"/>
-                <a:ea typeface="Arial" pitchFamily="34" charset="-122"/>
-                <a:cs typeface="Arial" pitchFamily="34" charset="-120"/>
-              </a:rPr>
-              <a:t>Y no lo confundas con la dirección de la dependencia en clases: aquí la etiqueta «include»/«extend» es la que da el significado.</a:t>
-            </a:r>
-            <a:endParaRPr lang="en-US" sz="1400" dirty="0"/>
-          </a:p>
-        </p:txBody>
-      </p:sp>
-      <p:sp>
-        <p:nvSpPr>
-          <p:cNvPr id="9" name="Text 6"/>
+          <p:cNvPr id="10" name="Text 7"/>
           <p:cNvSpPr/>
           <p:nvPr/>
         </p:nvSpPr>
@@ -7466,7 +8918,7 @@
                 <a:ea typeface="Arial" pitchFamily="34" charset="-122"/>
                 <a:cs typeface="Arial" pitchFamily="34" charset="-120"/>
               </a:rPr>
-              <a:t>Relaciones avanzadas: generalización</a:t>
+              <a:t>Relaciones avanzadas: extensión («extend»)</a:t>
             </a:r>
             <a:endParaRPr lang="en-US" sz="2300" dirty="0"/>
           </a:p>
@@ -7480,8 +8932,8 @@
         </p:nvSpPr>
         <p:spPr>
           <a:xfrm>
-            <a:off x="548640" y="1188720"/>
-            <a:ext cx="11091672" cy="2926080"/>
+            <a:off x="548640" y="1051560"/>
+            <a:ext cx="11091672" cy="1371600"/>
           </a:xfrm>
           <a:prstGeom prst="rect">
             <a:avLst/>
@@ -7508,7 +8960,7 @@
                 <a:ea typeface="Arial" pitchFamily="34" charset="-122"/>
                 <a:cs typeface="Arial" pitchFamily="34" charset="-120"/>
               </a:rPr>
-              <a:t>•  Funciona igual que la herencia del tema 5: el hijo hereda el comportamiento del padre y puede añadir o modificar.</a:t>
+              <a:t>•  Un caso de uso añade comportamiento OPCIONAL a otro cuando se cumple cierta condición. Es como un if en el flujo normal.</a:t>
             </a:r>
             <a:endParaRPr lang="en-US" sz="1600" dirty="0"/>
           </a:p>
@@ -7528,62 +8980,107 @@
                 <a:ea typeface="Arial" pitchFamily="34" charset="-122"/>
                 <a:cs typeface="Arial" pitchFamily="34" charset="-120"/>
               </a:rPr>
-              <a:t>•  Entre CASOS DE USO: varios casos comparten un comportamiento base.</a:t>
+              <a:t>•  Se dibuja igual que include (línea discontinua), pero la flecha apunta al caso BASE (el que se amplía).</a:t>
             </a:r>
             <a:endParaRPr lang="en-US" sz="1600" dirty="0"/>
           </a:p>
-          <a:p>
-            <a:pPr indent="0" marL="0">
-              <a:spcAft>
-                <a:spcPts val="800"/>
-              </a:spcAft>
+        </p:txBody>
+      </p:sp>
+      <p:sp>
+        <p:nvSpPr>
+          <p:cNvPr id="5" name="Shape 3"/>
+          <p:cNvSpPr/>
+          <p:nvPr/>
+        </p:nvSpPr>
+        <p:spPr>
+          <a:xfrm>
+            <a:off x="2194560" y="2606040"/>
+            <a:ext cx="7772400" cy="2029968"/>
+          </a:xfrm>
+          <a:prstGeom prst="rect">
+            <a:avLst/>
+          </a:prstGeom>
+          <a:ln w="12700">
+            <a:solidFill>
+              <a:srgbClr val="EEEEEE"/>
+            </a:solidFill>
+            <a:prstDash val="solid"/>
+          </a:ln>
+        </p:spPr>
+      </p:sp>
+      <p:pic>
+        <p:nvPicPr>
+          <p:cNvPr id="6" name="Image 0" descr="C:/Users/Aitor/Documents/apuntes-profe/entornos-de-desarrollo/docs/tema6/img/casos-extend-ejemplo.png">    </p:cNvPr>
+          <p:cNvPicPr>
+            <a:picLocks noChangeAspect="1"/>
+          </p:cNvPicPr>
+          <p:nvPr/>
+        </p:nvPicPr>
+        <p:blipFill>
+          <a:blip r:embed="rId1"/>
+          <a:stretch>
+            <a:fillRect/>
+          </a:stretch>
+        </p:blipFill>
+        <p:spPr>
+          <a:xfrm>
+            <a:off x="2194560" y="2606040"/>
+            <a:ext cx="7772400" cy="2029968"/>
+          </a:xfrm>
+          <a:prstGeom prst="rect">
+            <a:avLst/>
+          </a:prstGeom>
+        </p:spPr>
+      </p:pic>
+      <p:sp>
+        <p:nvSpPr>
+          <p:cNvPr id="7" name="Text 4"/>
+          <p:cNvSpPr/>
+          <p:nvPr/>
+        </p:nvSpPr>
+        <p:spPr>
+          <a:xfrm>
+            <a:off x="1920240" y="4663440"/>
+            <a:ext cx="8321040" cy="320040"/>
+          </a:xfrm>
+          <a:prstGeom prst="rect">
+            <a:avLst/>
+          </a:prstGeom>
+          <a:noFill/>
+          <a:ln/>
+        </p:spPr>
+        <p:txBody>
+          <a:bodyPr wrap="square" rtlCol="0" anchor="t"/>
+          <a:lstStyle/>
+          <a:p>
+            <a:pPr algn="ctr" indent="0" marL="0">
               <a:buNone/>
             </a:pPr>
             <a:r>
-              <a:rPr lang="en-US" sz="1600" dirty="0">
+              <a:rPr lang="en-US" sz="1100" i="1" dirty="0">
                 <a:solidFill>
-                  <a:srgbClr val="212121"/>
+                  <a:srgbClr val="757575"/>
                 </a:solidFill>
                 <a:latin typeface="Arial" pitchFamily="34" charset="0"/>
                 <a:ea typeface="Arial" pitchFamily="34" charset="-122"/>
                 <a:cs typeface="Arial" pitchFamily="34" charset="-120"/>
               </a:rPr>
-              <a:t>•  Entre ACTORES: un actor hereda los casos de uso de otro. Ejemplo: Administrador hereda todo lo que puede hacer Usuario y añade los suyos propios.</a:t>
-            </a:r>
-            <a:endParaRPr lang="en-US" sz="1600" dirty="0"/>
-          </a:p>
-          <a:p>
-            <a:pPr indent="0" marL="0">
-              <a:spcAft>
-                <a:spcPts val="800"/>
-              </a:spcAft>
-              <a:buNone/>
-            </a:pPr>
-            <a:r>
-              <a:rPr lang="en-US" sz="1600" dirty="0">
-                <a:solidFill>
-                  <a:srgbClr val="212121"/>
-                </a:solidFill>
-                <a:latin typeface="Arial" pitchFamily="34" charset="0"/>
-                <a:ea typeface="Arial" pitchFamily="34" charset="-122"/>
-                <a:cs typeface="Arial" pitchFamily="34" charset="-120"/>
-              </a:rPr>
-              <a:t>•  Se dibuja con la misma flecha de triángulo hueco de los diagramas de clases, apuntando al padre.</a:t>
-            </a:r>
-            <a:endParaRPr lang="en-US" sz="1600" dirty="0"/>
-          </a:p>
-        </p:txBody>
-      </p:sp>
-      <p:sp>
-        <p:nvSpPr>
-          <p:cNvPr id="5" name="Shape 3"/>
-          <p:cNvSpPr/>
-          <p:nvPr/>
-        </p:nvSpPr>
-        <p:spPr>
-          <a:xfrm>
-            <a:off x="548640" y="4663440"/>
-            <a:ext cx="11091672" cy="914400"/>
+              <a:t>«Extend»: "Validar cupón de descuento" solo se ejecuta cuando el usuario introduce un cupón.</a:t>
+            </a:r>
+            <a:endParaRPr lang="en-US" sz="1100" dirty="0"/>
+          </a:p>
+        </p:txBody>
+      </p:sp>
+      <p:sp>
+        <p:nvSpPr>
+          <p:cNvPr id="8" name="Shape 5"/>
+          <p:cNvSpPr/>
+          <p:nvPr/>
+        </p:nvSpPr>
+        <p:spPr>
+          <a:xfrm>
+            <a:off x="548640" y="5074920"/>
+            <a:ext cx="11091672" cy="1051560"/>
           </a:xfrm>
           <a:prstGeom prst="roundRect">
             <a:avLst/>
@@ -7601,14 +9098,14 @@
       </p:sp>
       <p:sp>
         <p:nvSpPr>
-          <p:cNvPr id="6" name="Text 4"/>
-          <p:cNvSpPr/>
-          <p:nvPr/>
-        </p:nvSpPr>
-        <p:spPr>
-          <a:xfrm>
-            <a:off x="777240" y="4736592"/>
-            <a:ext cx="10634472" cy="768096"/>
+          <p:cNvPr id="9" name="Text 6"/>
+          <p:cNvSpPr/>
+          <p:nvPr/>
+        </p:nvSpPr>
+        <p:spPr>
+          <a:xfrm>
+            <a:off x="777240" y="5148072"/>
+            <a:ext cx="10634472" cy="905256"/>
           </a:xfrm>
           <a:prstGeom prst="rect">
             <a:avLst/>
@@ -7632,7 +9129,7 @@
                 <a:ea typeface="Arial" pitchFamily="34" charset="-122"/>
                 <a:cs typeface="Arial" pitchFamily="34" charset="-120"/>
               </a:rPr>
-              <a:t>Cuándo usarla entre actores: si te descubres repitiendo las mismas líneas de comunicación para dos actores, probablemente uno generaliza al otro.</a:t>
+              <a:t>Ejemplo: "Aplicar cupón de descuento" extiende "Pagar pedido" — solo se ejecuta si el usuario tiene un cupón válido. La flecha sale del opcional hacia el caso base.</a:t>
             </a:r>
             <a:endParaRPr lang="en-US" sz="1500" dirty="0"/>
           </a:p>
@@ -7640,7 +9137,7 @@
       </p:sp>
       <p:sp>
         <p:nvSpPr>
-          <p:cNvPr id="7" name="Text 5"/>
+          <p:cNvPr id="10" name="Text 7"/>
           <p:cNvSpPr/>
           <p:nvPr/>
         </p:nvSpPr>
